--- a/docs/PR/FP_MAppleLab_Executive_Presentation.pptx
+++ b/docs/PR/FP_MAppleLab_Executive_Presentation.pptx
@@ -26,6 +26,7 @@
     <p:sldId id="274" r:id="rId25"/>
     <p:sldId id="275" r:id="rId26"/>
     <p:sldId id="276" r:id="rId27"/>
+    <p:sldId id="277" r:id="rId28"/>
   </p:sldIdLst>
   <p:sldSz cx="12188952" cy="6858000" type="screen4x3"/>
   <p:notesSz cx="6858000" cy="9144000"/>
@@ -3333,7 +3334,7 @@
                 <a:latin typeface="Segoe UI"/>
               </a:rPr>
               <a:t>A Corporate Private Cloud for Native macOS Virtual Machines
-Repurposed Hardware  |  BSL 1.1 Licensed  |  One-Time Production License</a:t>
+Repurposed Hardware  |  Free Tier up to 100 CPU Cores  |  Professional Setup &amp; Maintenance Services</a:t>
             </a:r>
           </a:p>
         </p:txBody>
@@ -13327,7 +13328,7 @@
                 </a:solidFill>
                 <a:latin typeface="Segoe UI"/>
               </a:rPr>
-              <a:t>Open-source foundations  |  BSL 1.1 licensed  |  One-time license grants full production use and modification rights</a:t>
+              <a:t>TART: Fair Use free tier (100 cores)  |  MAppleLab: free at this level  |  Professional setup and maintenance services available</a:t>
             </a:r>
           </a:p>
         </p:txBody>
@@ -13540,7 +13541,7 @@
                 </a:solidFill>
                 <a:latin typeface="Segoe UI"/>
               </a:rPr>
-              <a:t>Reference: Environment Architecture Diagram</a:t>
+              <a:t>Licensing &amp; Cost Model</a:t>
             </a:r>
           </a:p>
         </p:txBody>
@@ -13573,7 +13574,7 @@
                 </a:solidFill>
                 <a:latin typeface="Segoe UI"/>
               </a:rPr>
-              <a:t>End-to-end user journey — from browser to VM console and archived storage</a:t>
+              <a:t>Free software tier covers Forcepoint's needs — professional services for setup and maintenance</a:t>
             </a:r>
           </a:p>
         </p:txBody>
@@ -13586,14 +13587,1242 @@
         </p:nvSpPr>
         <p:spPr>
           <a:xfrm>
-            <a:off x="548640" y="1371600"/>
-            <a:ext cx="10972800" cy="4572000"/>
+            <a:off x="457200" y="1371600"/>
+            <a:ext cx="5394960" cy="2926080"/>
           </a:xfrm>
           <a:prstGeom prst="roundRect">
             <a:avLst/>
           </a:prstGeom>
           <a:solidFill>
-            <a:srgbClr val="12192B"/>
+            <a:srgbClr val="242F39"/>
+          </a:solidFill>
+          <a:ln w="12700">
+            <a:solidFill>
+              <a:srgbClr val="2ECC71"/>
+            </a:solidFill>
+          </a:ln>
+        </p:spPr>
+        <p:style>
+          <a:lnRef idx="1">
+            <a:schemeClr val="accent1"/>
+          </a:lnRef>
+          <a:fillRef idx="3">
+            <a:schemeClr val="accent1"/>
+          </a:fillRef>
+          <a:effectRef idx="2">
+            <a:schemeClr val="accent1"/>
+          </a:effectRef>
+          <a:fontRef idx="minor">
+            <a:schemeClr val="lt1"/>
+          </a:fontRef>
+        </p:style>
+        <p:txBody>
+          <a:bodyPr rtlCol="0" anchor="ctr"/>
+          <a:lstStyle/>
+          <a:p>
+            <a:pPr algn="ctr"/>
+          </a:p>
+        </p:txBody>
+      </p:sp>
+      <p:sp>
+        <p:nvSpPr>
+          <p:cNvPr id="7" name="Rectangle 6"/>
+          <p:cNvSpPr/>
+          <p:nvPr/>
+        </p:nvSpPr>
+        <p:spPr>
+          <a:xfrm>
+            <a:off x="457200" y="1371600"/>
+            <a:ext cx="5394960" cy="365760"/>
+          </a:xfrm>
+          <a:prstGeom prst="rect">
+            <a:avLst/>
+          </a:prstGeom>
+          <a:solidFill>
+            <a:srgbClr val="2ECC71"/>
+          </a:solidFill>
+          <a:ln>
+            <a:noFill/>
+          </a:ln>
+        </p:spPr>
+        <p:style>
+          <a:lnRef idx="1">
+            <a:schemeClr val="accent1"/>
+          </a:lnRef>
+          <a:fillRef idx="3">
+            <a:schemeClr val="accent1"/>
+          </a:fillRef>
+          <a:effectRef idx="2">
+            <a:schemeClr val="accent1"/>
+          </a:effectRef>
+          <a:fontRef idx="minor">
+            <a:schemeClr val="lt1"/>
+          </a:fontRef>
+        </p:style>
+        <p:txBody>
+          <a:bodyPr rtlCol="0" anchor="ctr"/>
+          <a:lstStyle/>
+          <a:p>
+            <a:pPr algn="ctr"/>
+          </a:p>
+        </p:txBody>
+      </p:sp>
+      <p:sp>
+        <p:nvSpPr>
+          <p:cNvPr id="8" name="TextBox 7"/>
+          <p:cNvSpPr txBox="1"/>
+          <p:nvPr/>
+        </p:nvSpPr>
+        <p:spPr>
+          <a:xfrm>
+            <a:off x="640080" y="1389888"/>
+            <a:ext cx="5029200" cy="329184"/>
+          </a:xfrm>
+          <a:prstGeom prst="rect">
+            <a:avLst/>
+          </a:prstGeom>
+          <a:noFill/>
+        </p:spPr>
+        <p:txBody>
+          <a:bodyPr wrap="square" anchor="t"/>
+          <a:lstStyle/>
+          <a:p>
+            <a:pPr algn="ctr"/>
+            <a:r>
+              <a:rPr sz="1400" b="1" i="0">
+                <a:solidFill>
+                  <a:srgbClr val="1D252C"/>
+                </a:solidFill>
+                <a:latin typeface="Segoe UI"/>
+              </a:rPr>
+              <a:t>FREE TIER — Software Licensing</a:t>
+            </a:r>
+          </a:p>
+        </p:txBody>
+      </p:sp>
+      <p:sp>
+        <p:nvSpPr>
+          <p:cNvPr id="9" name="Rectangle 8"/>
+          <p:cNvSpPr/>
+          <p:nvPr/>
+        </p:nvSpPr>
+        <p:spPr>
+          <a:xfrm>
+            <a:off x="640080" y="1874519"/>
+            <a:ext cx="54864" cy="384048"/>
+          </a:xfrm>
+          <a:prstGeom prst="rect">
+            <a:avLst/>
+          </a:prstGeom>
+          <a:solidFill>
+            <a:srgbClr val="007565"/>
+          </a:solidFill>
+          <a:ln>
+            <a:noFill/>
+          </a:ln>
+        </p:spPr>
+        <p:style>
+          <a:lnRef idx="1">
+            <a:schemeClr val="accent1"/>
+          </a:lnRef>
+          <a:fillRef idx="3">
+            <a:schemeClr val="accent1"/>
+          </a:fillRef>
+          <a:effectRef idx="2">
+            <a:schemeClr val="accent1"/>
+          </a:effectRef>
+          <a:fontRef idx="minor">
+            <a:schemeClr val="lt1"/>
+          </a:fontRef>
+        </p:style>
+        <p:txBody>
+          <a:bodyPr rtlCol="0" anchor="ctr"/>
+          <a:lstStyle/>
+          <a:p>
+            <a:pPr algn="ctr"/>
+          </a:p>
+        </p:txBody>
+      </p:sp>
+      <p:sp>
+        <p:nvSpPr>
+          <p:cNvPr id="10" name="TextBox 9"/>
+          <p:cNvSpPr txBox="1"/>
+          <p:nvPr/>
+        </p:nvSpPr>
+        <p:spPr>
+          <a:xfrm>
+            <a:off x="822960" y="1874519"/>
+            <a:ext cx="1463040" cy="201168"/>
+          </a:xfrm>
+          <a:prstGeom prst="rect">
+            <a:avLst/>
+          </a:prstGeom>
+          <a:noFill/>
+        </p:spPr>
+        <p:txBody>
+          <a:bodyPr wrap="square" anchor="t"/>
+          <a:lstStyle/>
+          <a:p>
+            <a:pPr algn="l"/>
+            <a:r>
+              <a:rPr sz="1000" b="1" i="0">
+                <a:solidFill>
+                  <a:srgbClr val="007565"/>
+                </a:solidFill>
+                <a:latin typeface="Segoe UI"/>
+              </a:rPr>
+              <a:t>TART Runtime</a:t>
+            </a:r>
+          </a:p>
+        </p:txBody>
+      </p:sp>
+      <p:sp>
+        <p:nvSpPr>
+          <p:cNvPr id="11" name="TextBox 10"/>
+          <p:cNvSpPr txBox="1"/>
+          <p:nvPr/>
+        </p:nvSpPr>
+        <p:spPr>
+          <a:xfrm>
+            <a:off x="822960" y="2057399"/>
+            <a:ext cx="4754880" cy="256032"/>
+          </a:xfrm>
+          <a:prstGeom prst="rect">
+            <a:avLst/>
+          </a:prstGeom>
+          <a:noFill/>
+        </p:spPr>
+        <p:txBody>
+          <a:bodyPr wrap="square" anchor="t"/>
+          <a:lstStyle/>
+          <a:p>
+            <a:pPr algn="l"/>
+            <a:r>
+              <a:rPr sz="900" b="0" i="0">
+                <a:solidFill>
+                  <a:srgbClr val="F2F4F5"/>
+                </a:solidFill>
+                <a:latin typeface="Segoe UI"/>
+              </a:rPr>
+              <a:t>Fair Use license — free for up to 100 CPU cores</a:t>
+            </a:r>
+          </a:p>
+        </p:txBody>
+      </p:sp>
+      <p:sp>
+        <p:nvSpPr>
+          <p:cNvPr id="12" name="Rectangle 11"/>
+          <p:cNvSpPr/>
+          <p:nvPr/>
+        </p:nvSpPr>
+        <p:spPr>
+          <a:xfrm>
+            <a:off x="640080" y="2350007"/>
+            <a:ext cx="54864" cy="384048"/>
+          </a:xfrm>
+          <a:prstGeom prst="rect">
+            <a:avLst/>
+          </a:prstGeom>
+          <a:solidFill>
+            <a:srgbClr val="007565"/>
+          </a:solidFill>
+          <a:ln>
+            <a:noFill/>
+          </a:ln>
+        </p:spPr>
+        <p:style>
+          <a:lnRef idx="1">
+            <a:schemeClr val="accent1"/>
+          </a:lnRef>
+          <a:fillRef idx="3">
+            <a:schemeClr val="accent1"/>
+          </a:fillRef>
+          <a:effectRef idx="2">
+            <a:schemeClr val="accent1"/>
+          </a:effectRef>
+          <a:fontRef idx="minor">
+            <a:schemeClr val="lt1"/>
+          </a:fontRef>
+        </p:style>
+        <p:txBody>
+          <a:bodyPr rtlCol="0" anchor="ctr"/>
+          <a:lstStyle/>
+          <a:p>
+            <a:pPr algn="ctr"/>
+          </a:p>
+        </p:txBody>
+      </p:sp>
+      <p:sp>
+        <p:nvSpPr>
+          <p:cNvPr id="13" name="TextBox 12"/>
+          <p:cNvSpPr txBox="1"/>
+          <p:nvPr/>
+        </p:nvSpPr>
+        <p:spPr>
+          <a:xfrm>
+            <a:off x="822960" y="2350007"/>
+            <a:ext cx="1463040" cy="201168"/>
+          </a:xfrm>
+          <a:prstGeom prst="rect">
+            <a:avLst/>
+          </a:prstGeom>
+          <a:noFill/>
+        </p:spPr>
+        <p:txBody>
+          <a:bodyPr wrap="square" anchor="t"/>
+          <a:lstStyle/>
+          <a:p>
+            <a:pPr algn="l"/>
+            <a:r>
+              <a:rPr sz="1000" b="1" i="0">
+                <a:solidFill>
+                  <a:srgbClr val="007565"/>
+                </a:solidFill>
+                <a:latin typeface="Segoe UI"/>
+              </a:rPr>
+              <a:t>MAppleLab UI</a:t>
+            </a:r>
+          </a:p>
+        </p:txBody>
+      </p:sp>
+      <p:sp>
+        <p:nvSpPr>
+          <p:cNvPr id="14" name="TextBox 13"/>
+          <p:cNvSpPr txBox="1"/>
+          <p:nvPr/>
+        </p:nvSpPr>
+        <p:spPr>
+          <a:xfrm>
+            <a:off x="822960" y="2532887"/>
+            <a:ext cx="4754880" cy="256032"/>
+          </a:xfrm>
+          <a:prstGeom prst="rect">
+            <a:avLst/>
+          </a:prstGeom>
+          <a:noFill/>
+        </p:spPr>
+        <p:txBody>
+          <a:bodyPr wrap="square" anchor="t"/>
+          <a:lstStyle/>
+          <a:p>
+            <a:pPr algn="l"/>
+            <a:r>
+              <a:rPr sz="900" b="0" i="0">
+                <a:solidFill>
+                  <a:srgbClr val="F2F4F5"/>
+                </a:solidFill>
+                <a:latin typeface="Segoe UI"/>
+              </a:rPr>
+              <a:t>Free for deployments within the TART free tier</a:t>
+            </a:r>
+          </a:p>
+        </p:txBody>
+      </p:sp>
+      <p:sp>
+        <p:nvSpPr>
+          <p:cNvPr id="15" name="Rectangle 14"/>
+          <p:cNvSpPr/>
+          <p:nvPr/>
+        </p:nvSpPr>
+        <p:spPr>
+          <a:xfrm>
+            <a:off x="640080" y="2825495"/>
+            <a:ext cx="54864" cy="384048"/>
+          </a:xfrm>
+          <a:prstGeom prst="rect">
+            <a:avLst/>
+          </a:prstGeom>
+          <a:solidFill>
+            <a:srgbClr val="006DAA"/>
+          </a:solidFill>
+          <a:ln>
+            <a:noFill/>
+          </a:ln>
+        </p:spPr>
+        <p:style>
+          <a:lnRef idx="1">
+            <a:schemeClr val="accent1"/>
+          </a:lnRef>
+          <a:fillRef idx="3">
+            <a:schemeClr val="accent1"/>
+          </a:fillRef>
+          <a:effectRef idx="2">
+            <a:schemeClr val="accent1"/>
+          </a:effectRef>
+          <a:fontRef idx="minor">
+            <a:schemeClr val="lt1"/>
+          </a:fontRef>
+        </p:style>
+        <p:txBody>
+          <a:bodyPr rtlCol="0" anchor="ctr"/>
+          <a:lstStyle/>
+          <a:p>
+            <a:pPr algn="ctr"/>
+          </a:p>
+        </p:txBody>
+      </p:sp>
+      <p:sp>
+        <p:nvSpPr>
+          <p:cNvPr id="16" name="TextBox 15"/>
+          <p:cNvSpPr txBox="1"/>
+          <p:nvPr/>
+        </p:nvSpPr>
+        <p:spPr>
+          <a:xfrm>
+            <a:off x="822960" y="2825495"/>
+            <a:ext cx="1463040" cy="201168"/>
+          </a:xfrm>
+          <a:prstGeom prst="rect">
+            <a:avLst/>
+          </a:prstGeom>
+          <a:noFill/>
+        </p:spPr>
+        <p:txBody>
+          <a:bodyPr wrap="square" anchor="t"/>
+          <a:lstStyle/>
+          <a:p>
+            <a:pPr algn="l"/>
+            <a:r>
+              <a:rPr sz="1000" b="1" i="0">
+                <a:solidFill>
+                  <a:srgbClr val="006DAA"/>
+                </a:solidFill>
+                <a:latin typeface="Segoe UI"/>
+              </a:rPr>
+              <a:t>Capacity</a:t>
+            </a:r>
+          </a:p>
+        </p:txBody>
+      </p:sp>
+      <p:sp>
+        <p:nvSpPr>
+          <p:cNvPr id="17" name="TextBox 16"/>
+          <p:cNvSpPr txBox="1"/>
+          <p:nvPr/>
+        </p:nvSpPr>
+        <p:spPr>
+          <a:xfrm>
+            <a:off x="822960" y="3008375"/>
+            <a:ext cx="4754880" cy="256032"/>
+          </a:xfrm>
+          <a:prstGeom prst="rect">
+            <a:avLst/>
+          </a:prstGeom>
+          <a:noFill/>
+        </p:spPr>
+        <p:txBody>
+          <a:bodyPr wrap="square" anchor="t"/>
+          <a:lstStyle/>
+          <a:p>
+            <a:pPr algn="l"/>
+            <a:r>
+              <a:rPr sz="900" b="0" i="0">
+                <a:solidFill>
+                  <a:srgbClr val="F2F4F5"/>
+                </a:solidFill>
+                <a:latin typeface="Segoe UI"/>
+              </a:rPr>
+              <a:t>~20 concurrent running VMs (at 4-5 cores each)</a:t>
+            </a:r>
+          </a:p>
+        </p:txBody>
+      </p:sp>
+      <p:sp>
+        <p:nvSpPr>
+          <p:cNvPr id="18" name="Rectangle 17"/>
+          <p:cNvSpPr/>
+          <p:nvPr/>
+        </p:nvSpPr>
+        <p:spPr>
+          <a:xfrm>
+            <a:off x="640080" y="3300983"/>
+            <a:ext cx="54864" cy="384048"/>
+          </a:xfrm>
+          <a:prstGeom prst="rect">
+            <a:avLst/>
+          </a:prstGeom>
+          <a:solidFill>
+            <a:srgbClr val="006DAA"/>
+          </a:solidFill>
+          <a:ln>
+            <a:noFill/>
+          </a:ln>
+        </p:spPr>
+        <p:style>
+          <a:lnRef idx="1">
+            <a:schemeClr val="accent1"/>
+          </a:lnRef>
+          <a:fillRef idx="3">
+            <a:schemeClr val="accent1"/>
+          </a:fillRef>
+          <a:effectRef idx="2">
+            <a:schemeClr val="accent1"/>
+          </a:effectRef>
+          <a:fontRef idx="minor">
+            <a:schemeClr val="lt1"/>
+          </a:fontRef>
+        </p:style>
+        <p:txBody>
+          <a:bodyPr rtlCol="0" anchor="ctr"/>
+          <a:lstStyle/>
+          <a:p>
+            <a:pPr algn="ctr"/>
+          </a:p>
+        </p:txBody>
+      </p:sp>
+      <p:sp>
+        <p:nvSpPr>
+          <p:cNvPr id="19" name="TextBox 18"/>
+          <p:cNvSpPr txBox="1"/>
+          <p:nvPr/>
+        </p:nvSpPr>
+        <p:spPr>
+          <a:xfrm>
+            <a:off x="822960" y="3300983"/>
+            <a:ext cx="1463040" cy="201168"/>
+          </a:xfrm>
+          <a:prstGeom prst="rect">
+            <a:avLst/>
+          </a:prstGeom>
+          <a:noFill/>
+        </p:spPr>
+        <p:txBody>
+          <a:bodyPr wrap="square" anchor="t"/>
+          <a:lstStyle/>
+          <a:p>
+            <a:pPr algn="l"/>
+            <a:r>
+              <a:rPr sz="1000" b="1" i="0">
+                <a:solidFill>
+                  <a:srgbClr val="006DAA"/>
+                </a:solidFill>
+                <a:latin typeface="Segoe UI"/>
+              </a:rPr>
+              <a:t>Daily Users</a:t>
+            </a:r>
+          </a:p>
+        </p:txBody>
+      </p:sp>
+      <p:sp>
+        <p:nvSpPr>
+          <p:cNvPr id="20" name="TextBox 19"/>
+          <p:cNvSpPr txBox="1"/>
+          <p:nvPr/>
+        </p:nvSpPr>
+        <p:spPr>
+          <a:xfrm>
+            <a:off x="822960" y="3483863"/>
+            <a:ext cx="4754880" cy="256032"/>
+          </a:xfrm>
+          <a:prstGeom prst="rect">
+            <a:avLst/>
+          </a:prstGeom>
+          <a:noFill/>
+        </p:spPr>
+        <p:txBody>
+          <a:bodyPr wrap="square" anchor="t"/>
+          <a:lstStyle/>
+          <a:p>
+            <a:pPr algn="l"/>
+            <a:r>
+              <a:rPr sz="900" b="0" i="0">
+                <a:solidFill>
+                  <a:srgbClr val="F2F4F5"/>
+                </a:solidFill>
+                <a:latin typeface="Segoe UI"/>
+              </a:rPr>
+              <a:t>Stopped VMs consume zero cores — daily active
+users far exceed 20 with proper scheduling</a:t>
+            </a:r>
+          </a:p>
+        </p:txBody>
+      </p:sp>
+      <p:sp>
+        <p:nvSpPr>
+          <p:cNvPr id="21" name="Rectangle 20"/>
+          <p:cNvSpPr/>
+          <p:nvPr/>
+        </p:nvSpPr>
+        <p:spPr>
+          <a:xfrm>
+            <a:off x="640080" y="3776471"/>
+            <a:ext cx="54864" cy="384048"/>
+          </a:xfrm>
+          <a:prstGeom prst="rect">
+            <a:avLst/>
+          </a:prstGeom>
+          <a:solidFill>
+            <a:srgbClr val="2ECC71"/>
+          </a:solidFill>
+          <a:ln>
+            <a:noFill/>
+          </a:ln>
+        </p:spPr>
+        <p:style>
+          <a:lnRef idx="1">
+            <a:schemeClr val="accent1"/>
+          </a:lnRef>
+          <a:fillRef idx="3">
+            <a:schemeClr val="accent1"/>
+          </a:fillRef>
+          <a:effectRef idx="2">
+            <a:schemeClr val="accent1"/>
+          </a:effectRef>
+          <a:fontRef idx="minor">
+            <a:schemeClr val="lt1"/>
+          </a:fontRef>
+        </p:style>
+        <p:txBody>
+          <a:bodyPr rtlCol="0" anchor="ctr"/>
+          <a:lstStyle/>
+          <a:p>
+            <a:pPr algn="ctr"/>
+          </a:p>
+        </p:txBody>
+      </p:sp>
+      <p:sp>
+        <p:nvSpPr>
+          <p:cNvPr id="22" name="TextBox 21"/>
+          <p:cNvSpPr txBox="1"/>
+          <p:nvPr/>
+        </p:nvSpPr>
+        <p:spPr>
+          <a:xfrm>
+            <a:off x="822960" y="3776471"/>
+            <a:ext cx="1463040" cy="201168"/>
+          </a:xfrm>
+          <a:prstGeom prst="rect">
+            <a:avLst/>
+          </a:prstGeom>
+          <a:noFill/>
+        </p:spPr>
+        <p:txBody>
+          <a:bodyPr wrap="square" anchor="t"/>
+          <a:lstStyle/>
+          <a:p>
+            <a:pPr algn="l"/>
+            <a:r>
+              <a:rPr sz="1000" b="1" i="0">
+                <a:solidFill>
+                  <a:srgbClr val="2ECC71"/>
+                </a:solidFill>
+                <a:latin typeface="Segoe UI"/>
+              </a:rPr>
+              <a:t>Licensing Cost</a:t>
+            </a:r>
+          </a:p>
+        </p:txBody>
+      </p:sp>
+      <p:sp>
+        <p:nvSpPr>
+          <p:cNvPr id="23" name="TextBox 22"/>
+          <p:cNvSpPr txBox="1"/>
+          <p:nvPr/>
+        </p:nvSpPr>
+        <p:spPr>
+          <a:xfrm>
+            <a:off x="822960" y="3959351"/>
+            <a:ext cx="4754880" cy="256032"/>
+          </a:xfrm>
+          <a:prstGeom prst="rect">
+            <a:avLst/>
+          </a:prstGeom>
+          <a:noFill/>
+        </p:spPr>
+        <p:txBody>
+          <a:bodyPr wrap="square" anchor="t"/>
+          <a:lstStyle/>
+          <a:p>
+            <a:pPr algn="l"/>
+            <a:r>
+              <a:rPr sz="900" b="0" i="0">
+                <a:solidFill>
+                  <a:srgbClr val="F2F4F5"/>
+                </a:solidFill>
+                <a:latin typeface="Segoe UI"/>
+              </a:rPr>
+              <a:t>ZERO for software at this scale</a:t>
+            </a:r>
+          </a:p>
+        </p:txBody>
+      </p:sp>
+      <p:sp>
+        <p:nvSpPr>
+          <p:cNvPr id="24" name="Rounded Rectangle 23"/>
+          <p:cNvSpPr/>
+          <p:nvPr/>
+        </p:nvSpPr>
+        <p:spPr>
+          <a:xfrm>
+            <a:off x="6217920" y="1371600"/>
+            <a:ext cx="5394960" cy="2926080"/>
+          </a:xfrm>
+          <a:prstGeom prst="roundRect">
+            <a:avLst/>
+          </a:prstGeom>
+          <a:solidFill>
+            <a:srgbClr val="242F39"/>
+          </a:solidFill>
+          <a:ln w="12700">
+            <a:solidFill>
+              <a:srgbClr val="F5A623"/>
+            </a:solidFill>
+          </a:ln>
+        </p:spPr>
+        <p:style>
+          <a:lnRef idx="1">
+            <a:schemeClr val="accent1"/>
+          </a:lnRef>
+          <a:fillRef idx="3">
+            <a:schemeClr val="accent1"/>
+          </a:fillRef>
+          <a:effectRef idx="2">
+            <a:schemeClr val="accent1"/>
+          </a:effectRef>
+          <a:fontRef idx="minor">
+            <a:schemeClr val="lt1"/>
+          </a:fontRef>
+        </p:style>
+        <p:txBody>
+          <a:bodyPr rtlCol="0" anchor="ctr"/>
+          <a:lstStyle/>
+          <a:p>
+            <a:pPr algn="ctr"/>
+          </a:p>
+        </p:txBody>
+      </p:sp>
+      <p:sp>
+        <p:nvSpPr>
+          <p:cNvPr id="25" name="Rectangle 24"/>
+          <p:cNvSpPr/>
+          <p:nvPr/>
+        </p:nvSpPr>
+        <p:spPr>
+          <a:xfrm>
+            <a:off x="6217920" y="1371600"/>
+            <a:ext cx="5394960" cy="365760"/>
+          </a:xfrm>
+          <a:prstGeom prst="rect">
+            <a:avLst/>
+          </a:prstGeom>
+          <a:solidFill>
+            <a:srgbClr val="F5A623"/>
+          </a:solidFill>
+          <a:ln>
+            <a:noFill/>
+          </a:ln>
+        </p:spPr>
+        <p:style>
+          <a:lnRef idx="1">
+            <a:schemeClr val="accent1"/>
+          </a:lnRef>
+          <a:fillRef idx="3">
+            <a:schemeClr val="accent1"/>
+          </a:fillRef>
+          <a:effectRef idx="2">
+            <a:schemeClr val="accent1"/>
+          </a:effectRef>
+          <a:fontRef idx="minor">
+            <a:schemeClr val="lt1"/>
+          </a:fontRef>
+        </p:style>
+        <p:txBody>
+          <a:bodyPr rtlCol="0" anchor="ctr"/>
+          <a:lstStyle/>
+          <a:p>
+            <a:pPr algn="ctr"/>
+          </a:p>
+        </p:txBody>
+      </p:sp>
+      <p:sp>
+        <p:nvSpPr>
+          <p:cNvPr id="26" name="TextBox 25"/>
+          <p:cNvSpPr txBox="1"/>
+          <p:nvPr/>
+        </p:nvSpPr>
+        <p:spPr>
+          <a:xfrm>
+            <a:off x="6400800" y="1389888"/>
+            <a:ext cx="5029200" cy="329184"/>
+          </a:xfrm>
+          <a:prstGeom prst="rect">
+            <a:avLst/>
+          </a:prstGeom>
+          <a:noFill/>
+        </p:spPr>
+        <p:txBody>
+          <a:bodyPr wrap="square" anchor="t"/>
+          <a:lstStyle/>
+          <a:p>
+            <a:pPr algn="ctr"/>
+            <a:r>
+              <a:rPr sz="1400" b="1" i="0">
+                <a:solidFill>
+                  <a:srgbClr val="1D252C"/>
+                </a:solidFill>
+                <a:latin typeface="Segoe UI"/>
+              </a:rPr>
+              <a:t>PROFESSIONAL SERVICES</a:t>
+            </a:r>
+          </a:p>
+        </p:txBody>
+      </p:sp>
+      <p:sp>
+        <p:nvSpPr>
+          <p:cNvPr id="27" name="Rectangle 26"/>
+          <p:cNvSpPr/>
+          <p:nvPr/>
+        </p:nvSpPr>
+        <p:spPr>
+          <a:xfrm>
+            <a:off x="6400800" y="1874519"/>
+            <a:ext cx="54864" cy="475488"/>
+          </a:xfrm>
+          <a:prstGeom prst="rect">
+            <a:avLst/>
+          </a:prstGeom>
+          <a:solidFill>
+            <a:srgbClr val="F5A623"/>
+          </a:solidFill>
+          <a:ln>
+            <a:noFill/>
+          </a:ln>
+        </p:spPr>
+        <p:style>
+          <a:lnRef idx="1">
+            <a:schemeClr val="accent1"/>
+          </a:lnRef>
+          <a:fillRef idx="3">
+            <a:schemeClr val="accent1"/>
+          </a:fillRef>
+          <a:effectRef idx="2">
+            <a:schemeClr val="accent1"/>
+          </a:effectRef>
+          <a:fontRef idx="minor">
+            <a:schemeClr val="lt1"/>
+          </a:fontRef>
+        </p:style>
+        <p:txBody>
+          <a:bodyPr rtlCol="0" anchor="ctr"/>
+          <a:lstStyle/>
+          <a:p>
+            <a:pPr algn="ctr"/>
+          </a:p>
+        </p:txBody>
+      </p:sp>
+      <p:sp>
+        <p:nvSpPr>
+          <p:cNvPr id="28" name="TextBox 27"/>
+          <p:cNvSpPr txBox="1"/>
+          <p:nvPr/>
+        </p:nvSpPr>
+        <p:spPr>
+          <a:xfrm>
+            <a:off x="6583680" y="1874519"/>
+            <a:ext cx="4754880" cy="201168"/>
+          </a:xfrm>
+          <a:prstGeom prst="rect">
+            <a:avLst/>
+          </a:prstGeom>
+          <a:noFill/>
+        </p:spPr>
+        <p:txBody>
+          <a:bodyPr wrap="square" anchor="t"/>
+          <a:lstStyle/>
+          <a:p>
+            <a:pPr algn="l"/>
+            <a:r>
+              <a:rPr sz="1000" b="1" i="0">
+                <a:solidFill>
+                  <a:srgbClr val="F5A623"/>
+                </a:solidFill>
+                <a:latin typeface="Segoe UI"/>
+              </a:rPr>
+              <a:t>Initial Configuration</a:t>
+            </a:r>
+          </a:p>
+        </p:txBody>
+      </p:sp>
+      <p:sp>
+        <p:nvSpPr>
+          <p:cNvPr id="29" name="TextBox 28"/>
+          <p:cNvSpPr txBox="1"/>
+          <p:nvPr/>
+        </p:nvSpPr>
+        <p:spPr>
+          <a:xfrm>
+            <a:off x="6583680" y="2075687"/>
+            <a:ext cx="4754880" cy="292608"/>
+          </a:xfrm>
+          <a:prstGeom prst="rect">
+            <a:avLst/>
+          </a:prstGeom>
+          <a:noFill/>
+        </p:spPr>
+        <p:txBody>
+          <a:bodyPr wrap="square" anchor="t"/>
+          <a:lstStyle/>
+          <a:p>
+            <a:pPr algn="l"/>
+            <a:r>
+              <a:rPr sz="900" b="0" i="0">
+                <a:solidFill>
+                  <a:srgbClr val="F2F4F5"/>
+                </a:solidFill>
+                <a:latin typeface="Segoe UI"/>
+              </a:rPr>
+              <a:t>Cluster setup, node deployment, network
+integration with Go4Labs, TLS configuration</a:t>
+            </a:r>
+          </a:p>
+        </p:txBody>
+      </p:sp>
+      <p:sp>
+        <p:nvSpPr>
+          <p:cNvPr id="30" name="Rectangle 29"/>
+          <p:cNvSpPr/>
+          <p:nvPr/>
+        </p:nvSpPr>
+        <p:spPr>
+          <a:xfrm>
+            <a:off x="6400800" y="2441447"/>
+            <a:ext cx="54864" cy="475488"/>
+          </a:xfrm>
+          <a:prstGeom prst="rect">
+            <a:avLst/>
+          </a:prstGeom>
+          <a:solidFill>
+            <a:srgbClr val="F5A623"/>
+          </a:solidFill>
+          <a:ln>
+            <a:noFill/>
+          </a:ln>
+        </p:spPr>
+        <p:style>
+          <a:lnRef idx="1">
+            <a:schemeClr val="accent1"/>
+          </a:lnRef>
+          <a:fillRef idx="3">
+            <a:schemeClr val="accent1"/>
+          </a:fillRef>
+          <a:effectRef idx="2">
+            <a:schemeClr val="accent1"/>
+          </a:effectRef>
+          <a:fontRef idx="minor">
+            <a:schemeClr val="lt1"/>
+          </a:fontRef>
+        </p:style>
+        <p:txBody>
+          <a:bodyPr rtlCol="0" anchor="ctr"/>
+          <a:lstStyle/>
+          <a:p>
+            <a:pPr algn="ctr"/>
+          </a:p>
+        </p:txBody>
+      </p:sp>
+      <p:sp>
+        <p:nvSpPr>
+          <p:cNvPr id="31" name="TextBox 30"/>
+          <p:cNvSpPr txBox="1"/>
+          <p:nvPr/>
+        </p:nvSpPr>
+        <p:spPr>
+          <a:xfrm>
+            <a:off x="6583680" y="2441447"/>
+            <a:ext cx="4754880" cy="201168"/>
+          </a:xfrm>
+          <a:prstGeom prst="rect">
+            <a:avLst/>
+          </a:prstGeom>
+          <a:noFill/>
+        </p:spPr>
+        <p:txBody>
+          <a:bodyPr wrap="square" anchor="t"/>
+          <a:lstStyle/>
+          <a:p>
+            <a:pPr algn="l"/>
+            <a:r>
+              <a:rPr sz="1000" b="1" i="0">
+                <a:solidFill>
+                  <a:srgbClr val="F5A623"/>
+                </a:solidFill>
+                <a:latin typeface="Segoe UI"/>
+              </a:rPr>
+              <a:t>Golden Image Build</a:t>
+            </a:r>
+          </a:p>
+        </p:txBody>
+      </p:sp>
+      <p:sp>
+        <p:nvSpPr>
+          <p:cNvPr id="32" name="TextBox 31"/>
+          <p:cNvSpPr txBox="1"/>
+          <p:nvPr/>
+        </p:nvSpPr>
+        <p:spPr>
+          <a:xfrm>
+            <a:off x="6583680" y="2642615"/>
+            <a:ext cx="4754880" cy="292608"/>
+          </a:xfrm>
+          <a:prstGeom prst="rect">
+            <a:avLst/>
+          </a:prstGeom>
+          <a:noFill/>
+        </p:spPr>
+        <p:txBody>
+          <a:bodyPr wrap="square" anchor="t"/>
+          <a:lstStyle/>
+          <a:p>
+            <a:pPr algn="l"/>
+            <a:r>
+              <a:rPr sz="900" b="0" i="0">
+                <a:solidFill>
+                  <a:srgbClr val="F2F4F5"/>
+                </a:solidFill>
+                <a:latin typeface="Segoe UI"/>
+              </a:rPr>
+              <a:t>Pre-configured macOS VMs with Forcepoint
+policies, agents, and standard tooling</a:t>
+            </a:r>
+          </a:p>
+        </p:txBody>
+      </p:sp>
+      <p:sp>
+        <p:nvSpPr>
+          <p:cNvPr id="33" name="Rectangle 32"/>
+          <p:cNvSpPr/>
+          <p:nvPr/>
+        </p:nvSpPr>
+        <p:spPr>
+          <a:xfrm>
+            <a:off x="6400800" y="3008375"/>
+            <a:ext cx="54864" cy="475488"/>
+          </a:xfrm>
+          <a:prstGeom prst="rect">
+            <a:avLst/>
+          </a:prstGeom>
+          <a:solidFill>
+            <a:srgbClr val="F5A623"/>
+          </a:solidFill>
+          <a:ln>
+            <a:noFill/>
+          </a:ln>
+        </p:spPr>
+        <p:style>
+          <a:lnRef idx="1">
+            <a:schemeClr val="accent1"/>
+          </a:lnRef>
+          <a:fillRef idx="3">
+            <a:schemeClr val="accent1"/>
+          </a:fillRef>
+          <a:effectRef idx="2">
+            <a:schemeClr val="accent1"/>
+          </a:effectRef>
+          <a:fontRef idx="minor">
+            <a:schemeClr val="lt1"/>
+          </a:fontRef>
+        </p:style>
+        <p:txBody>
+          <a:bodyPr rtlCol="0" anchor="ctr"/>
+          <a:lstStyle/>
+          <a:p>
+            <a:pPr algn="ctr"/>
+          </a:p>
+        </p:txBody>
+      </p:sp>
+      <p:sp>
+        <p:nvSpPr>
+          <p:cNvPr id="34" name="TextBox 33"/>
+          <p:cNvSpPr txBox="1"/>
+          <p:nvPr/>
+        </p:nvSpPr>
+        <p:spPr>
+          <a:xfrm>
+            <a:off x="6583680" y="3008375"/>
+            <a:ext cx="4754880" cy="201168"/>
+          </a:xfrm>
+          <a:prstGeom prst="rect">
+            <a:avLst/>
+          </a:prstGeom>
+          <a:noFill/>
+        </p:spPr>
+        <p:txBody>
+          <a:bodyPr wrap="square" anchor="t"/>
+          <a:lstStyle/>
+          <a:p>
+            <a:pPr algn="l"/>
+            <a:r>
+              <a:rPr sz="1000" b="1" i="0">
+                <a:solidFill>
+                  <a:srgbClr val="F5A623"/>
+                </a:solidFill>
+                <a:latin typeface="Segoe UI"/>
+              </a:rPr>
+              <a:t>Ongoing Maintenance</a:t>
+            </a:r>
+          </a:p>
+        </p:txBody>
+      </p:sp>
+      <p:sp>
+        <p:nvSpPr>
+          <p:cNvPr id="35" name="TextBox 34"/>
+          <p:cNvSpPr txBox="1"/>
+          <p:nvPr/>
+        </p:nvSpPr>
+        <p:spPr>
+          <a:xfrm>
+            <a:off x="6583680" y="3209543"/>
+            <a:ext cx="4754880" cy="292608"/>
+          </a:xfrm>
+          <a:prstGeom prst="rect">
+            <a:avLst/>
+          </a:prstGeom>
+          <a:noFill/>
+        </p:spPr>
+        <p:txBody>
+          <a:bodyPr wrap="square" anchor="t"/>
+          <a:lstStyle/>
+          <a:p>
+            <a:pPr algn="l"/>
+            <a:r>
+              <a:rPr sz="900" b="0" i="0">
+                <a:solidFill>
+                  <a:srgbClr val="F2F4F5"/>
+                </a:solidFill>
+                <a:latin typeface="Segoe UI"/>
+              </a:rPr>
+              <a:t>Node fleet management, software updates,
+registry maintenance, troubleshooting</a:t>
+            </a:r>
+          </a:p>
+        </p:txBody>
+      </p:sp>
+      <p:sp>
+        <p:nvSpPr>
+          <p:cNvPr id="36" name="Rectangle 35"/>
+          <p:cNvSpPr/>
+          <p:nvPr/>
+        </p:nvSpPr>
+        <p:spPr>
+          <a:xfrm>
+            <a:off x="6400800" y="3575303"/>
+            <a:ext cx="54864" cy="475488"/>
+          </a:xfrm>
+          <a:prstGeom prst="rect">
+            <a:avLst/>
+          </a:prstGeom>
+          <a:solidFill>
+            <a:srgbClr val="F5A623"/>
+          </a:solidFill>
+          <a:ln>
+            <a:noFill/>
+          </a:ln>
+        </p:spPr>
+        <p:style>
+          <a:lnRef idx="1">
+            <a:schemeClr val="accent1"/>
+          </a:lnRef>
+          <a:fillRef idx="3">
+            <a:schemeClr val="accent1"/>
+          </a:fillRef>
+          <a:effectRef idx="2">
+            <a:schemeClr val="accent1"/>
+          </a:effectRef>
+          <a:fontRef idx="minor">
+            <a:schemeClr val="lt1"/>
+          </a:fontRef>
+        </p:style>
+        <p:txBody>
+          <a:bodyPr rtlCol="0" anchor="ctr"/>
+          <a:lstStyle/>
+          <a:p>
+            <a:pPr algn="ctr"/>
+          </a:p>
+        </p:txBody>
+      </p:sp>
+      <p:sp>
+        <p:nvSpPr>
+          <p:cNvPr id="37" name="TextBox 36"/>
+          <p:cNvSpPr txBox="1"/>
+          <p:nvPr/>
+        </p:nvSpPr>
+        <p:spPr>
+          <a:xfrm>
+            <a:off x="6583680" y="3575303"/>
+            <a:ext cx="4754880" cy="201168"/>
+          </a:xfrm>
+          <a:prstGeom prst="rect">
+            <a:avLst/>
+          </a:prstGeom>
+          <a:noFill/>
+        </p:spPr>
+        <p:txBody>
+          <a:bodyPr wrap="square" anchor="t"/>
+          <a:lstStyle/>
+          <a:p>
+            <a:pPr algn="l"/>
+            <a:r>
+              <a:rPr sz="1000" b="1" i="0">
+                <a:solidFill>
+                  <a:srgbClr val="F5A623"/>
+                </a:solidFill>
+                <a:latin typeface="Segoe UI"/>
+              </a:rPr>
+              <a:t>Custom Development</a:t>
+            </a:r>
+          </a:p>
+        </p:txBody>
+      </p:sp>
+      <p:sp>
+        <p:nvSpPr>
+          <p:cNvPr id="38" name="TextBox 37"/>
+          <p:cNvSpPr txBox="1"/>
+          <p:nvPr/>
+        </p:nvSpPr>
+        <p:spPr>
+          <a:xfrm>
+            <a:off x="6583680" y="3776471"/>
+            <a:ext cx="4754880" cy="292608"/>
+          </a:xfrm>
+          <a:prstGeom prst="rect">
+            <a:avLst/>
+          </a:prstGeom>
+          <a:noFill/>
+        </p:spPr>
+        <p:txBody>
+          <a:bodyPr wrap="square" anchor="t"/>
+          <a:lstStyle/>
+          <a:p>
+            <a:pPr algn="l"/>
+            <a:r>
+              <a:rPr sz="900" b="0" i="0">
+                <a:solidFill>
+                  <a:srgbClr val="F2F4F5"/>
+                </a:solidFill>
+                <a:latin typeface="Segoe UI"/>
+              </a:rPr>
+              <a:t>Feature requests, integrations, workflow
+automation tailored to Forcepoint needs</a:t>
+            </a:r>
+          </a:p>
+        </p:txBody>
+      </p:sp>
+      <p:sp>
+        <p:nvSpPr>
+          <p:cNvPr id="39" name="Rounded Rectangle 38"/>
+          <p:cNvSpPr/>
+          <p:nvPr/>
+        </p:nvSpPr>
+        <p:spPr>
+          <a:xfrm>
+            <a:off x="457200" y="4480560"/>
+            <a:ext cx="11155680" cy="1188720"/>
+          </a:xfrm>
+          <a:prstGeom prst="roundRect">
+            <a:avLst/>
+          </a:prstGeom>
+          <a:solidFill>
+            <a:srgbClr val="242F39"/>
           </a:solidFill>
           <a:ln w="12700">
             <a:solidFill>
@@ -13625,55 +14854,20 @@
       </p:sp>
       <p:sp>
         <p:nvSpPr>
-          <p:cNvPr id="7" name="TextBox 6"/>
-          <p:cNvSpPr txBox="1"/>
-          <p:nvPr/>
-        </p:nvSpPr>
-        <p:spPr>
-          <a:xfrm>
-            <a:off x="1371600" y="2743200"/>
-            <a:ext cx="9144000" cy="1371600"/>
-          </a:xfrm>
-          <a:prstGeom prst="rect">
-            <a:avLst/>
-          </a:prstGeom>
-          <a:noFill/>
-        </p:spPr>
-        <p:txBody>
-          <a:bodyPr wrap="square" anchor="ctr"/>
-          <a:lstStyle/>
-          <a:p>
-            <a:pPr algn="ctr"/>
-            <a:r>
-              <a:rPr sz="1400" b="0" i="0">
-                <a:solidFill>
-                  <a:srgbClr val="8A939B"/>
-                </a:solidFill>
-                <a:latin typeface="Segoe UI"/>
-              </a:rPr>
-              <a:t>EMBED DIAGRAM FROM:
-/docs/schemas/pr/1_environment_architecture_user_experience.pptx
-(Copy the diagram slide from this file, or regenerate using generate_diagrams.py)</a:t>
-            </a:r>
-          </a:p>
-        </p:txBody>
-      </p:sp>
-      <p:sp>
-        <p:nvSpPr>
-          <p:cNvPr id="8" name="Rectangle 7"/>
+          <p:cNvPr id="40" name="Rectangle 39"/>
           <p:cNvSpPr/>
           <p:nvPr/>
         </p:nvSpPr>
         <p:spPr>
           <a:xfrm>
-            <a:off x="0" y="6528816"/>
-            <a:ext cx="12188952" cy="329184"/>
-          </a:xfrm>
-          <a:prstGeom prst="rect">
-            <a:avLst/>
-          </a:prstGeom>
-          <a:solidFill>
-            <a:srgbClr val="005C50"/>
+            <a:off x="457200" y="4480560"/>
+            <a:ext cx="11155680" cy="54864"/>
+          </a:xfrm>
+          <a:prstGeom prst="rect">
+            <a:avLst/>
+          </a:prstGeom>
+          <a:solidFill>
+            <a:srgbClr val="007565"/>
           </a:solidFill>
           <a:ln>
             <a:noFill/>
@@ -13703,7 +14897,230 @@
       </p:sp>
       <p:sp>
         <p:nvSpPr>
-          <p:cNvPr id="9" name="TextBox 8"/>
+          <p:cNvPr id="41" name="TextBox 40"/>
+          <p:cNvSpPr txBox="1"/>
+          <p:nvPr/>
+        </p:nvSpPr>
+        <p:spPr>
+          <a:xfrm>
+            <a:off x="731520" y="4617720"/>
+            <a:ext cx="10607040" cy="320040"/>
+          </a:xfrm>
+          <a:prstGeom prst="rect">
+            <a:avLst/>
+          </a:prstGeom>
+          <a:noFill/>
+        </p:spPr>
+        <p:txBody>
+          <a:bodyPr wrap="square" anchor="t"/>
+          <a:lstStyle/>
+          <a:p>
+            <a:pPr algn="l"/>
+            <a:r>
+              <a:rPr sz="1300" b="1" i="0">
+                <a:solidFill>
+                  <a:srgbClr val="009E8A"/>
+                </a:solidFill>
+                <a:latin typeface="Segoe UI"/>
+              </a:rPr>
+              <a:t>Capacity Planning: Free Tier Accommodates Forcepoint's Scale</a:t>
+            </a:r>
+          </a:p>
+        </p:txBody>
+      </p:sp>
+      <p:sp>
+        <p:nvSpPr>
+          <p:cNvPr id="42" name="TextBox 41"/>
+          <p:cNvSpPr txBox="1"/>
+          <p:nvPr/>
+        </p:nvSpPr>
+        <p:spPr>
+          <a:xfrm>
+            <a:off x="731520" y="4937760"/>
+            <a:ext cx="10607040" cy="640080"/>
+          </a:xfrm>
+          <a:prstGeom prst="rect">
+            <a:avLst/>
+          </a:prstGeom>
+          <a:noFill/>
+        </p:spPr>
+        <p:txBody>
+          <a:bodyPr wrap="square"/>
+          <a:lstStyle/>
+          <a:p>
+            <a:pPr algn="l">
+              <a:spcAft>
+                <a:spcPts val="400"/>
+              </a:spcAft>
+            </a:pPr>
+            <a:r>
+              <a:rPr sz="1000" b="0">
+                <a:solidFill>
+                  <a:srgbClr val="F2F4F5"/>
+                </a:solidFill>
+                <a:latin typeface="Segoe UI"/>
+              </a:rPr>
+              <a:t>▸  100 CPU cores ≈ 10 nodes (2 VMs each) ≈ 20 concurrent running VMs</a:t>
+            </a:r>
+          </a:p>
+          <a:p>
+            <a:pPr algn="l">
+              <a:spcAft>
+                <a:spcPts val="400"/>
+              </a:spcAft>
+            </a:pPr>
+            <a:r>
+              <a:rPr sz="1000" b="0">
+                <a:solidFill>
+                  <a:srgbClr val="F2F4F5"/>
+                </a:solidFill>
+                <a:latin typeface="Segoe UI"/>
+              </a:rPr>
+              <a:t>▸  Stopped/archived VMs consume no cores — users share capacity across shifts and time zones</a:t>
+            </a:r>
+          </a:p>
+          <a:p>
+            <a:pPr algn="l">
+              <a:spcAft>
+                <a:spcPts val="400"/>
+              </a:spcAft>
+            </a:pPr>
+            <a:r>
+              <a:rPr sz="1000" b="0">
+                <a:solidFill>
+                  <a:srgbClr val="F2F4F5"/>
+                </a:solidFill>
+                <a:latin typeface="Segoe UI"/>
+              </a:rPr>
+              <a:t>▸  With ad-hoc usage patterns, 20 concurrent VMs can serve 50+ daily active users comfortably</a:t>
+            </a:r>
+          </a:p>
+        </p:txBody>
+      </p:sp>
+      <p:sp>
+        <p:nvSpPr>
+          <p:cNvPr id="43" name="Rounded Rectangle 42"/>
+          <p:cNvSpPr/>
+          <p:nvPr/>
+        </p:nvSpPr>
+        <p:spPr>
+          <a:xfrm>
+            <a:off x="457200" y="5943600"/>
+            <a:ext cx="11155680" cy="502920"/>
+          </a:xfrm>
+          <a:prstGeom prst="roundRect">
+            <a:avLst/>
+          </a:prstGeom>
+          <a:solidFill>
+            <a:srgbClr val="005C50"/>
+          </a:solidFill>
+          <a:ln w="12700">
+            <a:solidFill>
+              <a:srgbClr val="007565"/>
+            </a:solidFill>
+          </a:ln>
+        </p:spPr>
+        <p:style>
+          <a:lnRef idx="1">
+            <a:schemeClr val="accent1"/>
+          </a:lnRef>
+          <a:fillRef idx="3">
+            <a:schemeClr val="accent1"/>
+          </a:fillRef>
+          <a:effectRef idx="2">
+            <a:schemeClr val="accent1"/>
+          </a:effectRef>
+          <a:fontRef idx="minor">
+            <a:schemeClr val="lt1"/>
+          </a:fontRef>
+        </p:style>
+        <p:txBody>
+          <a:bodyPr rtlCol="0" anchor="ctr"/>
+          <a:lstStyle/>
+          <a:p>
+            <a:pPr algn="ctr"/>
+          </a:p>
+        </p:txBody>
+      </p:sp>
+      <p:sp>
+        <p:nvSpPr>
+          <p:cNvPr id="44" name="TextBox 43"/>
+          <p:cNvSpPr txBox="1"/>
+          <p:nvPr/>
+        </p:nvSpPr>
+        <p:spPr>
+          <a:xfrm>
+            <a:off x="640080" y="5989320"/>
+            <a:ext cx="10789920" cy="411480"/>
+          </a:xfrm>
+          <a:prstGeom prst="rect">
+            <a:avLst/>
+          </a:prstGeom>
+          <a:noFill/>
+        </p:spPr>
+        <p:txBody>
+          <a:bodyPr wrap="square" anchor="ctr"/>
+          <a:lstStyle/>
+          <a:p>
+            <a:pPr algn="ctr"/>
+            <a:r>
+              <a:rPr sz="1300" b="1" i="0">
+                <a:solidFill>
+                  <a:srgbClr val="FFFFFF"/>
+                </a:solidFill>
+                <a:latin typeface="Segoe UI"/>
+              </a:rPr>
+              <a:t>Software is free at Forcepoint's scale — professional services ensure a smooth, maintained deployment</a:t>
+            </a:r>
+          </a:p>
+        </p:txBody>
+      </p:sp>
+      <p:sp>
+        <p:nvSpPr>
+          <p:cNvPr id="45" name="Rectangle 44"/>
+          <p:cNvSpPr/>
+          <p:nvPr/>
+        </p:nvSpPr>
+        <p:spPr>
+          <a:xfrm>
+            <a:off x="0" y="6528816"/>
+            <a:ext cx="12188952" cy="329184"/>
+          </a:xfrm>
+          <a:prstGeom prst="rect">
+            <a:avLst/>
+          </a:prstGeom>
+          <a:solidFill>
+            <a:srgbClr val="005C50"/>
+          </a:solidFill>
+          <a:ln>
+            <a:noFill/>
+          </a:ln>
+        </p:spPr>
+        <p:style>
+          <a:lnRef idx="1">
+            <a:schemeClr val="accent1"/>
+          </a:lnRef>
+          <a:fillRef idx="3">
+            <a:schemeClr val="accent1"/>
+          </a:fillRef>
+          <a:effectRef idx="2">
+            <a:schemeClr val="accent1"/>
+          </a:effectRef>
+          <a:fontRef idx="minor">
+            <a:schemeClr val="lt1"/>
+          </a:fontRef>
+        </p:style>
+        <p:txBody>
+          <a:bodyPr rtlCol="0" anchor="ctr"/>
+          <a:lstStyle/>
+          <a:p>
+            <a:pPr algn="ctr"/>
+          </a:p>
+        </p:txBody>
+      </p:sp>
+      <p:sp>
+        <p:nvSpPr>
+          <p:cNvPr id="46" name="TextBox 45"/>
           <p:cNvSpPr txBox="1"/>
           <p:nvPr/>
         </p:nvSpPr>
@@ -13866,7 +15283,7 @@
                 </a:solidFill>
                 <a:latin typeface="Segoe UI"/>
               </a:rPr>
-              <a:t>Reference: Technical Architecture Diagram</a:t>
+              <a:t>Reference: Environment Architecture Diagram</a:t>
             </a:r>
           </a:p>
         </p:txBody>
@@ -13899,7 +15316,7 @@
                 </a:solidFill>
                 <a:latin typeface="Segoe UI"/>
               </a:rPr>
-              <a:t>Internal modules, data stores, and protocol-level communication channels</a:t>
+              <a:t>End-to-end user journey — from browser to VM console and archived storage</a:t>
             </a:r>
           </a:p>
         </p:txBody>
@@ -13923,7 +15340,7 @@
           </a:solidFill>
           <a:ln w="12700">
             <a:solidFill>
-              <a:srgbClr val="006DAA"/>
+              <a:srgbClr val="007565"/>
             </a:solidFill>
           </a:ln>
         </p:spPr>
@@ -13978,7 +15395,7 @@
                 <a:latin typeface="Segoe UI"/>
               </a:rPr>
               <a:t>EMBED DIAGRAM FROM:
-/docs/schemas/pr/2_technical_architecture_modules_and_channels.pptx
+/docs/schemas/pr/1_environment_architecture_user_experience.pptx
 (Copy the diagram slide from this file, or regenerate using generate_diagrams.py)</a:t>
             </a:r>
           </a:p>
@@ -14192,7 +15609,7 @@
                 </a:solidFill>
                 <a:latin typeface="Segoe UI"/>
               </a:rPr>
-              <a:t>Reference: Portal Structure Diagram</a:t>
+              <a:t>Reference: Technical Architecture Diagram</a:t>
             </a:r>
           </a:p>
         </p:txBody>
@@ -14225,7 +15642,7 @@
                 </a:solidFill>
                 <a:latin typeface="Segoe UI"/>
               </a:rPr>
-              <a:t>Component hierarchy, user-facing features, and admin functions</a:t>
+              <a:t>Internal modules, data stores, and protocol-level communication channels</a:t>
             </a:r>
           </a:p>
         </p:txBody>
@@ -14249,7 +15666,7 @@
           </a:solidFill>
           <a:ln w="12700">
             <a:solidFill>
-              <a:srgbClr val="F5A623"/>
+              <a:srgbClr val="006DAA"/>
             </a:solidFill>
           </a:ln>
         </p:spPr>
@@ -14304,7 +15721,7 @@
                 <a:latin typeface="Segoe UI"/>
               </a:rPr>
               <a:t>EMBED DIAGRAM FROM:
-/docs/schemas/pr/3_portal_structure_components_and_functions.pptx
+/docs/schemas/pr/2_technical_architecture_modules_and_channels.pptx
 (Copy the diagram slide from this file, or regenerate using generate_diagrams.py)</a:t>
             </a:r>
           </a:p>
@@ -16197,7 +17614,7 @@
                 </a:solidFill>
                 <a:latin typeface="Segoe UI"/>
               </a:rPr>
-              <a:t>Next Steps: Scaling FP MAppleLab Across Forcepoint</a:t>
+              <a:t>Reference: Portal Structure Diagram</a:t>
             </a:r>
           </a:p>
         </p:txBody>
@@ -16230,7 +17647,7 @@
                 </a:solidFill>
                 <a:latin typeface="Segoe UI"/>
               </a:rPr>
-              <a:t>From pilot to production — a clear path forward</a:t>
+              <a:t>Component hierarchy, user-facing features, and admin functions</a:t>
             </a:r>
           </a:p>
         </p:txBody>
@@ -16243,18 +17660,18 @@
         </p:nvSpPr>
         <p:spPr>
           <a:xfrm>
-            <a:off x="457200" y="1371600"/>
-            <a:ext cx="2560320" cy="2743200"/>
+            <a:off x="548640" y="1371600"/>
+            <a:ext cx="10972800" cy="4572000"/>
           </a:xfrm>
           <a:prstGeom prst="roundRect">
             <a:avLst/>
           </a:prstGeom>
           <a:solidFill>
-            <a:srgbClr val="242F39"/>
+            <a:srgbClr val="12192B"/>
           </a:solidFill>
           <a:ln w="12700">
             <a:solidFill>
-              <a:srgbClr val="007565"/>
+              <a:srgbClr val="F5A623"/>
             </a:solidFill>
           </a:ln>
         </p:spPr>
@@ -16282,20 +17699,55 @@
       </p:sp>
       <p:sp>
         <p:nvSpPr>
-          <p:cNvPr id="7" name="Rectangle 6"/>
+          <p:cNvPr id="7" name="TextBox 6"/>
+          <p:cNvSpPr txBox="1"/>
+          <p:nvPr/>
+        </p:nvSpPr>
+        <p:spPr>
+          <a:xfrm>
+            <a:off x="1371600" y="2743200"/>
+            <a:ext cx="9144000" cy="1371600"/>
+          </a:xfrm>
+          <a:prstGeom prst="rect">
+            <a:avLst/>
+          </a:prstGeom>
+          <a:noFill/>
+        </p:spPr>
+        <p:txBody>
+          <a:bodyPr wrap="square" anchor="ctr"/>
+          <a:lstStyle/>
+          <a:p>
+            <a:pPr algn="ctr"/>
+            <a:r>
+              <a:rPr sz="1400" b="0" i="0">
+                <a:solidFill>
+                  <a:srgbClr val="8A939B"/>
+                </a:solidFill>
+                <a:latin typeface="Segoe UI"/>
+              </a:rPr>
+              <a:t>EMBED DIAGRAM FROM:
+/docs/schemas/pr/3_portal_structure_components_and_functions.pptx
+(Copy the diagram slide from this file, or regenerate using generate_diagrams.py)</a:t>
+            </a:r>
+          </a:p>
+        </p:txBody>
+      </p:sp>
+      <p:sp>
+        <p:nvSpPr>
+          <p:cNvPr id="8" name="Rectangle 7"/>
           <p:cNvSpPr/>
           <p:nvPr/>
         </p:nvSpPr>
         <p:spPr>
           <a:xfrm>
-            <a:off x="457200" y="1371600"/>
-            <a:ext cx="2560320" cy="54864"/>
-          </a:xfrm>
-          <a:prstGeom prst="rect">
-            <a:avLst/>
-          </a:prstGeom>
-          <a:solidFill>
-            <a:srgbClr val="007565"/>
+            <a:off x="0" y="6528816"/>
+            <a:ext cx="12188952" cy="329184"/>
+          </a:xfrm>
+          <a:prstGeom prst="rect">
+            <a:avLst/>
+          </a:prstGeom>
+          <a:solidFill>
+            <a:srgbClr val="005C50"/>
           </a:solidFill>
           <a:ln>
             <a:noFill/>
@@ -16325,1458 +17777,7 @@
       </p:sp>
       <p:sp>
         <p:nvSpPr>
-          <p:cNvPr id="8" name="Oval 7"/>
-          <p:cNvSpPr/>
-          <p:nvPr/>
-        </p:nvSpPr>
-        <p:spPr>
-          <a:xfrm>
-            <a:off x="1463040" y="1554480"/>
-            <a:ext cx="502920" cy="502920"/>
-          </a:xfrm>
-          <a:prstGeom prst="ellipse">
-            <a:avLst/>
-          </a:prstGeom>
-          <a:solidFill>
-            <a:srgbClr val="007565"/>
-          </a:solidFill>
-          <a:ln>
-            <a:noFill/>
-          </a:ln>
-        </p:spPr>
-        <p:style>
-          <a:lnRef idx="1">
-            <a:schemeClr val="accent1"/>
-          </a:lnRef>
-          <a:fillRef idx="3">
-            <a:schemeClr val="accent1"/>
-          </a:fillRef>
-          <a:effectRef idx="2">
-            <a:schemeClr val="accent1"/>
-          </a:effectRef>
-          <a:fontRef idx="minor">
-            <a:schemeClr val="lt1"/>
-          </a:fontRef>
-        </p:style>
-        <p:txBody>
-          <a:bodyPr rtlCol="0" anchor="ctr"/>
-          <a:lstStyle/>
-          <a:p>
-            <a:pPr algn="ctr"/>
-          </a:p>
-        </p:txBody>
-      </p:sp>
-      <p:sp>
-        <p:nvSpPr>
           <p:cNvPr id="9" name="TextBox 8"/>
-          <p:cNvSpPr txBox="1"/>
-          <p:nvPr/>
-        </p:nvSpPr>
-        <p:spPr>
-          <a:xfrm>
-            <a:off x="1463040" y="1554480"/>
-            <a:ext cx="502920" cy="502920"/>
-          </a:xfrm>
-          <a:prstGeom prst="rect">
-            <a:avLst/>
-          </a:prstGeom>
-          <a:noFill/>
-        </p:spPr>
-        <p:txBody>
-          <a:bodyPr wrap="square" anchor="ctr"/>
-          <a:lstStyle/>
-          <a:p>
-            <a:pPr algn="ctr"/>
-            <a:r>
-              <a:rPr sz="1800" b="1" i="0">
-                <a:solidFill>
-                  <a:srgbClr val="1D252C"/>
-                </a:solidFill>
-                <a:latin typeface="Segoe UI"/>
-              </a:rPr>
-              <a:t>01</a:t>
-            </a:r>
-          </a:p>
-        </p:txBody>
-      </p:sp>
-      <p:sp>
-        <p:nvSpPr>
-          <p:cNvPr id="10" name="TextBox 9"/>
-          <p:cNvSpPr txBox="1"/>
-          <p:nvPr/>
-        </p:nvSpPr>
-        <p:spPr>
-          <a:xfrm>
-            <a:off x="594360" y="2148840"/>
-            <a:ext cx="2286000" cy="320040"/>
-          </a:xfrm>
-          <a:prstGeom prst="rect">
-            <a:avLst/>
-          </a:prstGeom>
-          <a:noFill/>
-        </p:spPr>
-        <p:txBody>
-          <a:bodyPr wrap="square" anchor="t"/>
-          <a:lstStyle/>
-          <a:p>
-            <a:pPr algn="ctr"/>
-            <a:r>
-              <a:rPr sz="1400" b="1" i="0">
-                <a:solidFill>
-                  <a:srgbClr val="007565"/>
-                </a:solidFill>
-                <a:latin typeface="Segoe UI"/>
-              </a:rPr>
-              <a:t>Pilot Validation</a:t>
-            </a:r>
-          </a:p>
-        </p:txBody>
-      </p:sp>
-      <p:sp>
-        <p:nvSpPr>
-          <p:cNvPr id="11" name="TextBox 10"/>
-          <p:cNvSpPr txBox="1"/>
-          <p:nvPr/>
-        </p:nvSpPr>
-        <p:spPr>
-          <a:xfrm>
-            <a:off x="594360" y="2514600"/>
-            <a:ext cx="2286000" cy="914400"/>
-          </a:xfrm>
-          <a:prstGeom prst="rect">
-            <a:avLst/>
-          </a:prstGeom>
-          <a:noFill/>
-        </p:spPr>
-        <p:txBody>
-          <a:bodyPr wrap="square" anchor="t"/>
-          <a:lstStyle/>
-          <a:p>
-            <a:pPr algn="ctr"/>
-            <a:r>
-              <a:rPr sz="1000" b="0" i="0">
-                <a:solidFill>
-                  <a:srgbClr val="F2F4F5"/>
-                </a:solidFill>
-                <a:latin typeface="Segoe UI"/>
-              </a:rPr>
-              <a:t>Current deployment proves concept with real
-users across TS, PS, and engineering teams.</a:t>
-            </a:r>
-          </a:p>
-        </p:txBody>
-      </p:sp>
-      <p:sp>
-        <p:nvSpPr>
-          <p:cNvPr id="12" name="Rounded Rectangle 11"/>
-          <p:cNvSpPr/>
-          <p:nvPr/>
-        </p:nvSpPr>
-        <p:spPr>
-          <a:xfrm>
-            <a:off x="1188720" y="3703320"/>
-            <a:ext cx="1097280" cy="256032"/>
-          </a:xfrm>
-          <a:prstGeom prst="roundRect">
-            <a:avLst/>
-          </a:prstGeom>
-          <a:solidFill>
-            <a:srgbClr val="2ECC71"/>
-          </a:solidFill>
-          <a:ln>
-            <a:noFill/>
-          </a:ln>
-        </p:spPr>
-        <p:style>
-          <a:lnRef idx="1">
-            <a:schemeClr val="accent1"/>
-          </a:lnRef>
-          <a:fillRef idx="3">
-            <a:schemeClr val="accent1"/>
-          </a:fillRef>
-          <a:effectRef idx="2">
-            <a:schemeClr val="accent1"/>
-          </a:effectRef>
-          <a:fontRef idx="minor">
-            <a:schemeClr val="lt1"/>
-          </a:fontRef>
-        </p:style>
-        <p:txBody>
-          <a:bodyPr rtlCol="0" anchor="ctr"/>
-          <a:lstStyle/>
-          <a:p>
-            <a:pPr algn="ctr"/>
-          </a:p>
-        </p:txBody>
-      </p:sp>
-      <p:sp>
-        <p:nvSpPr>
-          <p:cNvPr id="13" name="TextBox 12"/>
-          <p:cNvSpPr txBox="1"/>
-          <p:nvPr/>
-        </p:nvSpPr>
-        <p:spPr>
-          <a:xfrm>
-            <a:off x="1188720" y="3703320"/>
-            <a:ext cx="1097280" cy="256032"/>
-          </a:xfrm>
-          <a:prstGeom prst="rect">
-            <a:avLst/>
-          </a:prstGeom>
-          <a:noFill/>
-        </p:spPr>
-        <p:txBody>
-          <a:bodyPr wrap="square" anchor="ctr"/>
-          <a:lstStyle/>
-          <a:p>
-            <a:pPr algn="ctr"/>
-            <a:r>
-              <a:rPr sz="800" b="1" i="0">
-                <a:solidFill>
-                  <a:srgbClr val="1D252C"/>
-                </a:solidFill>
-                <a:latin typeface="Segoe UI"/>
-              </a:rPr>
-              <a:t>COMPLETE</a:t>
-            </a:r>
-          </a:p>
-        </p:txBody>
-      </p:sp>
-      <p:sp>
-        <p:nvSpPr>
-          <p:cNvPr id="14" name="Rounded Rectangle 13"/>
-          <p:cNvSpPr/>
-          <p:nvPr/>
-        </p:nvSpPr>
-        <p:spPr>
-          <a:xfrm>
-            <a:off x="3200400" y="1371600"/>
-            <a:ext cx="2560320" cy="2743200"/>
-          </a:xfrm>
-          <a:prstGeom prst="roundRect">
-            <a:avLst/>
-          </a:prstGeom>
-          <a:solidFill>
-            <a:srgbClr val="242F39"/>
-          </a:solidFill>
-          <a:ln w="12700">
-            <a:solidFill>
-              <a:srgbClr val="006DAA"/>
-            </a:solidFill>
-          </a:ln>
-        </p:spPr>
-        <p:style>
-          <a:lnRef idx="1">
-            <a:schemeClr val="accent1"/>
-          </a:lnRef>
-          <a:fillRef idx="3">
-            <a:schemeClr val="accent1"/>
-          </a:fillRef>
-          <a:effectRef idx="2">
-            <a:schemeClr val="accent1"/>
-          </a:effectRef>
-          <a:fontRef idx="minor">
-            <a:schemeClr val="lt1"/>
-          </a:fontRef>
-        </p:style>
-        <p:txBody>
-          <a:bodyPr rtlCol="0" anchor="ctr"/>
-          <a:lstStyle/>
-          <a:p>
-            <a:pPr algn="ctr"/>
-          </a:p>
-        </p:txBody>
-      </p:sp>
-      <p:sp>
-        <p:nvSpPr>
-          <p:cNvPr id="15" name="Rectangle 14"/>
-          <p:cNvSpPr/>
-          <p:nvPr/>
-        </p:nvSpPr>
-        <p:spPr>
-          <a:xfrm>
-            <a:off x="3200400" y="1371600"/>
-            <a:ext cx="2560320" cy="54864"/>
-          </a:xfrm>
-          <a:prstGeom prst="rect">
-            <a:avLst/>
-          </a:prstGeom>
-          <a:solidFill>
-            <a:srgbClr val="006DAA"/>
-          </a:solidFill>
-          <a:ln>
-            <a:noFill/>
-          </a:ln>
-        </p:spPr>
-        <p:style>
-          <a:lnRef idx="1">
-            <a:schemeClr val="accent1"/>
-          </a:lnRef>
-          <a:fillRef idx="3">
-            <a:schemeClr val="accent1"/>
-          </a:fillRef>
-          <a:effectRef idx="2">
-            <a:schemeClr val="accent1"/>
-          </a:effectRef>
-          <a:fontRef idx="minor">
-            <a:schemeClr val="lt1"/>
-          </a:fontRef>
-        </p:style>
-        <p:txBody>
-          <a:bodyPr rtlCol="0" anchor="ctr"/>
-          <a:lstStyle/>
-          <a:p>
-            <a:pPr algn="ctr"/>
-          </a:p>
-        </p:txBody>
-      </p:sp>
-      <p:sp>
-        <p:nvSpPr>
-          <p:cNvPr id="16" name="Oval 15"/>
-          <p:cNvSpPr/>
-          <p:nvPr/>
-        </p:nvSpPr>
-        <p:spPr>
-          <a:xfrm>
-            <a:off x="4206240" y="1554480"/>
-            <a:ext cx="502920" cy="502920"/>
-          </a:xfrm>
-          <a:prstGeom prst="ellipse">
-            <a:avLst/>
-          </a:prstGeom>
-          <a:solidFill>
-            <a:srgbClr val="006DAA"/>
-          </a:solidFill>
-          <a:ln>
-            <a:noFill/>
-          </a:ln>
-        </p:spPr>
-        <p:style>
-          <a:lnRef idx="1">
-            <a:schemeClr val="accent1"/>
-          </a:lnRef>
-          <a:fillRef idx="3">
-            <a:schemeClr val="accent1"/>
-          </a:fillRef>
-          <a:effectRef idx="2">
-            <a:schemeClr val="accent1"/>
-          </a:effectRef>
-          <a:fontRef idx="minor">
-            <a:schemeClr val="lt1"/>
-          </a:fontRef>
-        </p:style>
-        <p:txBody>
-          <a:bodyPr rtlCol="0" anchor="ctr"/>
-          <a:lstStyle/>
-          <a:p>
-            <a:pPr algn="ctr"/>
-          </a:p>
-        </p:txBody>
-      </p:sp>
-      <p:sp>
-        <p:nvSpPr>
-          <p:cNvPr id="17" name="TextBox 16"/>
-          <p:cNvSpPr txBox="1"/>
-          <p:nvPr/>
-        </p:nvSpPr>
-        <p:spPr>
-          <a:xfrm>
-            <a:off x="4206240" y="1554480"/>
-            <a:ext cx="502920" cy="502920"/>
-          </a:xfrm>
-          <a:prstGeom prst="rect">
-            <a:avLst/>
-          </a:prstGeom>
-          <a:noFill/>
-        </p:spPr>
-        <p:txBody>
-          <a:bodyPr wrap="square" anchor="ctr"/>
-          <a:lstStyle/>
-          <a:p>
-            <a:pPr algn="ctr"/>
-            <a:r>
-              <a:rPr sz="1800" b="1" i="0">
-                <a:solidFill>
-                  <a:srgbClr val="1D252C"/>
-                </a:solidFill>
-                <a:latin typeface="Segoe UI"/>
-              </a:rPr>
-              <a:t>02</a:t>
-            </a:r>
-          </a:p>
-        </p:txBody>
-      </p:sp>
-      <p:sp>
-        <p:nvSpPr>
-          <p:cNvPr id="18" name="TextBox 17"/>
-          <p:cNvSpPr txBox="1"/>
-          <p:nvPr/>
-        </p:nvSpPr>
-        <p:spPr>
-          <a:xfrm>
-            <a:off x="3337560" y="2148840"/>
-            <a:ext cx="2286000" cy="320040"/>
-          </a:xfrm>
-          <a:prstGeom prst="rect">
-            <a:avLst/>
-          </a:prstGeom>
-          <a:noFill/>
-        </p:spPr>
-        <p:txBody>
-          <a:bodyPr wrap="square" anchor="t"/>
-          <a:lstStyle/>
-          <a:p>
-            <a:pPr algn="ctr"/>
-            <a:r>
-              <a:rPr sz="1400" b="1" i="0">
-                <a:solidFill>
-                  <a:srgbClr val="006DAA"/>
-                </a:solidFill>
-                <a:latin typeface="Segoe UI"/>
-              </a:rPr>
-              <a:t>Hardware Collection</a:t>
-            </a:r>
-          </a:p>
-        </p:txBody>
-      </p:sp>
-      <p:sp>
-        <p:nvSpPr>
-          <p:cNvPr id="19" name="TextBox 18"/>
-          <p:cNvSpPr txBox="1"/>
-          <p:nvPr/>
-        </p:nvSpPr>
-        <p:spPr>
-          <a:xfrm>
-            <a:off x="3337560" y="2514600"/>
-            <a:ext cx="2286000" cy="914400"/>
-          </a:xfrm>
-          <a:prstGeom prst="rect">
-            <a:avLst/>
-          </a:prstGeom>
-          <a:noFill/>
-        </p:spPr>
-        <p:txBody>
-          <a:bodyPr wrap="square" anchor="t"/>
-          <a:lstStyle/>
-          <a:p>
-            <a:pPr algn="ctr"/>
-            <a:r>
-              <a:rPr sz="1000" b="0" i="0">
-                <a:solidFill>
-                  <a:srgbClr val="F2F4F5"/>
-                </a:solidFill>
-                <a:latin typeface="Segoe UI"/>
-              </a:rPr>
-              <a:t>Identify and collect decommissioned Mac Mini
-and MacBook Pro units from IT inventory.</a:t>
-            </a:r>
-          </a:p>
-        </p:txBody>
-      </p:sp>
-      <p:sp>
-        <p:nvSpPr>
-          <p:cNvPr id="20" name="Rounded Rectangle 19"/>
-          <p:cNvSpPr/>
-          <p:nvPr/>
-        </p:nvSpPr>
-        <p:spPr>
-          <a:xfrm>
-            <a:off x="3931920" y="3703320"/>
-            <a:ext cx="1097280" cy="256032"/>
-          </a:xfrm>
-          <a:prstGeom prst="roundRect">
-            <a:avLst/>
-          </a:prstGeom>
-          <a:solidFill>
-            <a:srgbClr val="F5A623"/>
-          </a:solidFill>
-          <a:ln>
-            <a:noFill/>
-          </a:ln>
-        </p:spPr>
-        <p:style>
-          <a:lnRef idx="1">
-            <a:schemeClr val="accent1"/>
-          </a:lnRef>
-          <a:fillRef idx="3">
-            <a:schemeClr val="accent1"/>
-          </a:fillRef>
-          <a:effectRef idx="2">
-            <a:schemeClr val="accent1"/>
-          </a:effectRef>
-          <a:fontRef idx="minor">
-            <a:schemeClr val="lt1"/>
-          </a:fontRef>
-        </p:style>
-        <p:txBody>
-          <a:bodyPr rtlCol="0" anchor="ctr"/>
-          <a:lstStyle/>
-          <a:p>
-            <a:pPr algn="ctr"/>
-          </a:p>
-        </p:txBody>
-      </p:sp>
-      <p:sp>
-        <p:nvSpPr>
-          <p:cNvPr id="21" name="TextBox 20"/>
-          <p:cNvSpPr txBox="1"/>
-          <p:nvPr/>
-        </p:nvSpPr>
-        <p:spPr>
-          <a:xfrm>
-            <a:off x="3931920" y="3703320"/>
-            <a:ext cx="1097280" cy="256032"/>
-          </a:xfrm>
-          <a:prstGeom prst="rect">
-            <a:avLst/>
-          </a:prstGeom>
-          <a:noFill/>
-        </p:spPr>
-        <p:txBody>
-          <a:bodyPr wrap="square" anchor="ctr"/>
-          <a:lstStyle/>
-          <a:p>
-            <a:pPr algn="ctr"/>
-            <a:r>
-              <a:rPr sz="800" b="1" i="0">
-                <a:solidFill>
-                  <a:srgbClr val="1D252C"/>
-                </a:solidFill>
-                <a:latin typeface="Segoe UI"/>
-              </a:rPr>
-              <a:t>IN PROGRESS</a:t>
-            </a:r>
-          </a:p>
-        </p:txBody>
-      </p:sp>
-      <p:sp>
-        <p:nvSpPr>
-          <p:cNvPr id="22" name="Rounded Rectangle 21"/>
-          <p:cNvSpPr/>
-          <p:nvPr/>
-        </p:nvSpPr>
-        <p:spPr>
-          <a:xfrm>
-            <a:off x="5943600" y="1371600"/>
-            <a:ext cx="2560320" cy="2743200"/>
-          </a:xfrm>
-          <a:prstGeom prst="roundRect">
-            <a:avLst/>
-          </a:prstGeom>
-          <a:solidFill>
-            <a:srgbClr val="242F39"/>
-          </a:solidFill>
-          <a:ln w="12700">
-            <a:solidFill>
-              <a:srgbClr val="F5A623"/>
-            </a:solidFill>
-          </a:ln>
-        </p:spPr>
-        <p:style>
-          <a:lnRef idx="1">
-            <a:schemeClr val="accent1"/>
-          </a:lnRef>
-          <a:fillRef idx="3">
-            <a:schemeClr val="accent1"/>
-          </a:fillRef>
-          <a:effectRef idx="2">
-            <a:schemeClr val="accent1"/>
-          </a:effectRef>
-          <a:fontRef idx="minor">
-            <a:schemeClr val="lt1"/>
-          </a:fontRef>
-        </p:style>
-        <p:txBody>
-          <a:bodyPr rtlCol="0" anchor="ctr"/>
-          <a:lstStyle/>
-          <a:p>
-            <a:pPr algn="ctr"/>
-          </a:p>
-        </p:txBody>
-      </p:sp>
-      <p:sp>
-        <p:nvSpPr>
-          <p:cNvPr id="23" name="Rectangle 22"/>
-          <p:cNvSpPr/>
-          <p:nvPr/>
-        </p:nvSpPr>
-        <p:spPr>
-          <a:xfrm>
-            <a:off x="5943600" y="1371600"/>
-            <a:ext cx="2560320" cy="54864"/>
-          </a:xfrm>
-          <a:prstGeom prst="rect">
-            <a:avLst/>
-          </a:prstGeom>
-          <a:solidFill>
-            <a:srgbClr val="F5A623"/>
-          </a:solidFill>
-          <a:ln>
-            <a:noFill/>
-          </a:ln>
-        </p:spPr>
-        <p:style>
-          <a:lnRef idx="1">
-            <a:schemeClr val="accent1"/>
-          </a:lnRef>
-          <a:fillRef idx="3">
-            <a:schemeClr val="accent1"/>
-          </a:fillRef>
-          <a:effectRef idx="2">
-            <a:schemeClr val="accent1"/>
-          </a:effectRef>
-          <a:fontRef idx="minor">
-            <a:schemeClr val="lt1"/>
-          </a:fontRef>
-        </p:style>
-        <p:txBody>
-          <a:bodyPr rtlCol="0" anchor="ctr"/>
-          <a:lstStyle/>
-          <a:p>
-            <a:pPr algn="ctr"/>
-          </a:p>
-        </p:txBody>
-      </p:sp>
-      <p:sp>
-        <p:nvSpPr>
-          <p:cNvPr id="24" name="Oval 23"/>
-          <p:cNvSpPr/>
-          <p:nvPr/>
-        </p:nvSpPr>
-        <p:spPr>
-          <a:xfrm>
-            <a:off x="6949440" y="1554480"/>
-            <a:ext cx="502920" cy="502920"/>
-          </a:xfrm>
-          <a:prstGeom prst="ellipse">
-            <a:avLst/>
-          </a:prstGeom>
-          <a:solidFill>
-            <a:srgbClr val="F5A623"/>
-          </a:solidFill>
-          <a:ln>
-            <a:noFill/>
-          </a:ln>
-        </p:spPr>
-        <p:style>
-          <a:lnRef idx="1">
-            <a:schemeClr val="accent1"/>
-          </a:lnRef>
-          <a:fillRef idx="3">
-            <a:schemeClr val="accent1"/>
-          </a:fillRef>
-          <a:effectRef idx="2">
-            <a:schemeClr val="accent1"/>
-          </a:effectRef>
-          <a:fontRef idx="minor">
-            <a:schemeClr val="lt1"/>
-          </a:fontRef>
-        </p:style>
-        <p:txBody>
-          <a:bodyPr rtlCol="0" anchor="ctr"/>
-          <a:lstStyle/>
-          <a:p>
-            <a:pPr algn="ctr"/>
-          </a:p>
-        </p:txBody>
-      </p:sp>
-      <p:sp>
-        <p:nvSpPr>
-          <p:cNvPr id="25" name="TextBox 24"/>
-          <p:cNvSpPr txBox="1"/>
-          <p:nvPr/>
-        </p:nvSpPr>
-        <p:spPr>
-          <a:xfrm>
-            <a:off x="6949440" y="1554480"/>
-            <a:ext cx="502920" cy="502920"/>
-          </a:xfrm>
-          <a:prstGeom prst="rect">
-            <a:avLst/>
-          </a:prstGeom>
-          <a:noFill/>
-        </p:spPr>
-        <p:txBody>
-          <a:bodyPr wrap="square" anchor="ctr"/>
-          <a:lstStyle/>
-          <a:p>
-            <a:pPr algn="ctr"/>
-            <a:r>
-              <a:rPr sz="1800" b="1" i="0">
-                <a:solidFill>
-                  <a:srgbClr val="1D252C"/>
-                </a:solidFill>
-                <a:latin typeface="Segoe UI"/>
-              </a:rPr>
-              <a:t>03</a:t>
-            </a:r>
-          </a:p>
-        </p:txBody>
-      </p:sp>
-      <p:sp>
-        <p:nvSpPr>
-          <p:cNvPr id="26" name="TextBox 25"/>
-          <p:cNvSpPr txBox="1"/>
-          <p:nvPr/>
-        </p:nvSpPr>
-        <p:spPr>
-          <a:xfrm>
-            <a:off x="6080760" y="2148840"/>
-            <a:ext cx="2286000" cy="320040"/>
-          </a:xfrm>
-          <a:prstGeom prst="rect">
-            <a:avLst/>
-          </a:prstGeom>
-          <a:noFill/>
-        </p:spPr>
-        <p:txBody>
-          <a:bodyPr wrap="square" anchor="t"/>
-          <a:lstStyle/>
-          <a:p>
-            <a:pPr algn="ctr"/>
-            <a:r>
-              <a:rPr sz="1400" b="1" i="0">
-                <a:solidFill>
-                  <a:srgbClr val="F5A623"/>
-                </a:solidFill>
-                <a:latin typeface="Segoe UI"/>
-              </a:rPr>
-              <a:t>Cluster Expansion</a:t>
-            </a:r>
-          </a:p>
-        </p:txBody>
-      </p:sp>
-      <p:sp>
-        <p:nvSpPr>
-          <p:cNvPr id="27" name="TextBox 26"/>
-          <p:cNvSpPr txBox="1"/>
-          <p:nvPr/>
-        </p:nvSpPr>
-        <p:spPr>
-          <a:xfrm>
-            <a:off x="6080760" y="2514600"/>
-            <a:ext cx="2286000" cy="914400"/>
-          </a:xfrm>
-          <a:prstGeom prst="rect">
-            <a:avLst/>
-          </a:prstGeom>
-          <a:noFill/>
-        </p:spPr>
-        <p:txBody>
-          <a:bodyPr wrap="square" anchor="t"/>
-          <a:lstStyle/>
-          <a:p>
-            <a:pPr algn="ctr"/>
-            <a:r>
-              <a:rPr sz="1000" b="0" i="0">
-                <a:solidFill>
-                  <a:srgbClr val="F2F4F5"/>
-                </a:solidFill>
-                <a:latin typeface="Segoe UI"/>
-              </a:rPr>
-              <a:t>Deploy TART agent on collected hardware.
-Add nodes to the cluster via install script.</a:t>
-            </a:r>
-          </a:p>
-        </p:txBody>
-      </p:sp>
-      <p:sp>
-        <p:nvSpPr>
-          <p:cNvPr id="28" name="Rounded Rectangle 27"/>
-          <p:cNvSpPr/>
-          <p:nvPr/>
-        </p:nvSpPr>
-        <p:spPr>
-          <a:xfrm>
-            <a:off x="6675120" y="3703320"/>
-            <a:ext cx="1097280" cy="256032"/>
-          </a:xfrm>
-          <a:prstGeom prst="roundRect">
-            <a:avLst/>
-          </a:prstGeom>
-          <a:solidFill>
-            <a:srgbClr val="006DAA"/>
-          </a:solidFill>
-          <a:ln>
-            <a:noFill/>
-          </a:ln>
-        </p:spPr>
-        <p:style>
-          <a:lnRef idx="1">
-            <a:schemeClr val="accent1"/>
-          </a:lnRef>
-          <a:fillRef idx="3">
-            <a:schemeClr val="accent1"/>
-          </a:fillRef>
-          <a:effectRef idx="2">
-            <a:schemeClr val="accent1"/>
-          </a:effectRef>
-          <a:fontRef idx="minor">
-            <a:schemeClr val="lt1"/>
-          </a:fontRef>
-        </p:style>
-        <p:txBody>
-          <a:bodyPr rtlCol="0" anchor="ctr"/>
-          <a:lstStyle/>
-          <a:p>
-            <a:pPr algn="ctr"/>
-          </a:p>
-        </p:txBody>
-      </p:sp>
-      <p:sp>
-        <p:nvSpPr>
-          <p:cNvPr id="29" name="TextBox 28"/>
-          <p:cNvSpPr txBox="1"/>
-          <p:nvPr/>
-        </p:nvSpPr>
-        <p:spPr>
-          <a:xfrm>
-            <a:off x="6675120" y="3703320"/>
-            <a:ext cx="1097280" cy="256032"/>
-          </a:xfrm>
-          <a:prstGeom prst="rect">
-            <a:avLst/>
-          </a:prstGeom>
-          <a:noFill/>
-        </p:spPr>
-        <p:txBody>
-          <a:bodyPr wrap="square" anchor="ctr"/>
-          <a:lstStyle/>
-          <a:p>
-            <a:pPr algn="ctr"/>
-            <a:r>
-              <a:rPr sz="800" b="1" i="0">
-                <a:solidFill>
-                  <a:srgbClr val="1D252C"/>
-                </a:solidFill>
-                <a:latin typeface="Segoe UI"/>
-              </a:rPr>
-              <a:t>NEXT</a:t>
-            </a:r>
-          </a:p>
-        </p:txBody>
-      </p:sp>
-      <p:sp>
-        <p:nvSpPr>
-          <p:cNvPr id="30" name="Rounded Rectangle 29"/>
-          <p:cNvSpPr/>
-          <p:nvPr/>
-        </p:nvSpPr>
-        <p:spPr>
-          <a:xfrm>
-            <a:off x="8686800" y="1371600"/>
-            <a:ext cx="2560320" cy="2743200"/>
-          </a:xfrm>
-          <a:prstGeom prst="roundRect">
-            <a:avLst/>
-          </a:prstGeom>
-          <a:solidFill>
-            <a:srgbClr val="242F39"/>
-          </a:solidFill>
-          <a:ln w="12700">
-            <a:solidFill>
-              <a:srgbClr val="2ECC71"/>
-            </a:solidFill>
-          </a:ln>
-        </p:spPr>
-        <p:style>
-          <a:lnRef idx="1">
-            <a:schemeClr val="accent1"/>
-          </a:lnRef>
-          <a:fillRef idx="3">
-            <a:schemeClr val="accent1"/>
-          </a:fillRef>
-          <a:effectRef idx="2">
-            <a:schemeClr val="accent1"/>
-          </a:effectRef>
-          <a:fontRef idx="minor">
-            <a:schemeClr val="lt1"/>
-          </a:fontRef>
-        </p:style>
-        <p:txBody>
-          <a:bodyPr rtlCol="0" anchor="ctr"/>
-          <a:lstStyle/>
-          <a:p>
-            <a:pPr algn="ctr"/>
-          </a:p>
-        </p:txBody>
-      </p:sp>
-      <p:sp>
-        <p:nvSpPr>
-          <p:cNvPr id="31" name="Rectangle 30"/>
-          <p:cNvSpPr/>
-          <p:nvPr/>
-        </p:nvSpPr>
-        <p:spPr>
-          <a:xfrm>
-            <a:off x="8686800" y="1371600"/>
-            <a:ext cx="2560320" cy="54864"/>
-          </a:xfrm>
-          <a:prstGeom prst="rect">
-            <a:avLst/>
-          </a:prstGeom>
-          <a:solidFill>
-            <a:srgbClr val="2ECC71"/>
-          </a:solidFill>
-          <a:ln>
-            <a:noFill/>
-          </a:ln>
-        </p:spPr>
-        <p:style>
-          <a:lnRef idx="1">
-            <a:schemeClr val="accent1"/>
-          </a:lnRef>
-          <a:fillRef idx="3">
-            <a:schemeClr val="accent1"/>
-          </a:fillRef>
-          <a:effectRef idx="2">
-            <a:schemeClr val="accent1"/>
-          </a:effectRef>
-          <a:fontRef idx="minor">
-            <a:schemeClr val="lt1"/>
-          </a:fontRef>
-        </p:style>
-        <p:txBody>
-          <a:bodyPr rtlCol="0" anchor="ctr"/>
-          <a:lstStyle/>
-          <a:p>
-            <a:pPr algn="ctr"/>
-          </a:p>
-        </p:txBody>
-      </p:sp>
-      <p:sp>
-        <p:nvSpPr>
-          <p:cNvPr id="32" name="Oval 31"/>
-          <p:cNvSpPr/>
-          <p:nvPr/>
-        </p:nvSpPr>
-        <p:spPr>
-          <a:xfrm>
-            <a:off x="9692640" y="1554480"/>
-            <a:ext cx="502920" cy="502920"/>
-          </a:xfrm>
-          <a:prstGeom prst="ellipse">
-            <a:avLst/>
-          </a:prstGeom>
-          <a:solidFill>
-            <a:srgbClr val="2ECC71"/>
-          </a:solidFill>
-          <a:ln>
-            <a:noFill/>
-          </a:ln>
-        </p:spPr>
-        <p:style>
-          <a:lnRef idx="1">
-            <a:schemeClr val="accent1"/>
-          </a:lnRef>
-          <a:fillRef idx="3">
-            <a:schemeClr val="accent1"/>
-          </a:fillRef>
-          <a:effectRef idx="2">
-            <a:schemeClr val="accent1"/>
-          </a:effectRef>
-          <a:fontRef idx="minor">
-            <a:schemeClr val="lt1"/>
-          </a:fontRef>
-        </p:style>
-        <p:txBody>
-          <a:bodyPr rtlCol="0" anchor="ctr"/>
-          <a:lstStyle/>
-          <a:p>
-            <a:pPr algn="ctr"/>
-          </a:p>
-        </p:txBody>
-      </p:sp>
-      <p:sp>
-        <p:nvSpPr>
-          <p:cNvPr id="33" name="TextBox 32"/>
-          <p:cNvSpPr txBox="1"/>
-          <p:nvPr/>
-        </p:nvSpPr>
-        <p:spPr>
-          <a:xfrm>
-            <a:off x="9692640" y="1554480"/>
-            <a:ext cx="502920" cy="502920"/>
-          </a:xfrm>
-          <a:prstGeom prst="rect">
-            <a:avLst/>
-          </a:prstGeom>
-          <a:noFill/>
-        </p:spPr>
-        <p:txBody>
-          <a:bodyPr wrap="square" anchor="ctr"/>
-          <a:lstStyle/>
-          <a:p>
-            <a:pPr algn="ctr"/>
-            <a:r>
-              <a:rPr sz="1800" b="1" i="0">
-                <a:solidFill>
-                  <a:srgbClr val="1D252C"/>
-                </a:solidFill>
-                <a:latin typeface="Segoe UI"/>
-              </a:rPr>
-              <a:t>04</a:t>
-            </a:r>
-          </a:p>
-        </p:txBody>
-      </p:sp>
-      <p:sp>
-        <p:nvSpPr>
-          <p:cNvPr id="34" name="TextBox 33"/>
-          <p:cNvSpPr txBox="1"/>
-          <p:nvPr/>
-        </p:nvSpPr>
-        <p:spPr>
-          <a:xfrm>
-            <a:off x="8823960" y="2148840"/>
-            <a:ext cx="2286000" cy="320040"/>
-          </a:xfrm>
-          <a:prstGeom prst="rect">
-            <a:avLst/>
-          </a:prstGeom>
-          <a:noFill/>
-        </p:spPr>
-        <p:txBody>
-          <a:bodyPr wrap="square" anchor="t"/>
-          <a:lstStyle/>
-          <a:p>
-            <a:pPr algn="ctr"/>
-            <a:r>
-              <a:rPr sz="1400" b="1" i="0">
-                <a:solidFill>
-                  <a:srgbClr val="2ECC71"/>
-                </a:solidFill>
-                <a:latin typeface="Segoe UI"/>
-              </a:rPr>
-              <a:t>Organization Rollout</a:t>
-            </a:r>
-          </a:p>
-        </p:txBody>
-      </p:sp>
-      <p:sp>
-        <p:nvSpPr>
-          <p:cNvPr id="35" name="TextBox 34"/>
-          <p:cNvSpPr txBox="1"/>
-          <p:nvPr/>
-        </p:nvSpPr>
-        <p:spPr>
-          <a:xfrm>
-            <a:off x="8823960" y="2514600"/>
-            <a:ext cx="2286000" cy="914400"/>
-          </a:xfrm>
-          <a:prstGeom prst="rect">
-            <a:avLst/>
-          </a:prstGeom>
-          <a:noFill/>
-        </p:spPr>
-        <p:txBody>
-          <a:bodyPr wrap="square" anchor="t"/>
-          <a:lstStyle/>
-          <a:p>
-            <a:pPr algn="ctr"/>
-            <a:r>
-              <a:rPr sz="1000" b="0" i="0">
-                <a:solidFill>
-                  <a:srgbClr val="F2F4F5"/>
-                </a:solidFill>
-                <a:latin typeface="Segoe UI"/>
-              </a:rPr>
-              <a:t>Onboard remaining teams. Configure golden
-images with standard Forcepoint policies.</a:t>
-            </a:r>
-          </a:p>
-        </p:txBody>
-      </p:sp>
-      <p:sp>
-        <p:nvSpPr>
-          <p:cNvPr id="36" name="Rounded Rectangle 35"/>
-          <p:cNvSpPr/>
-          <p:nvPr/>
-        </p:nvSpPr>
-        <p:spPr>
-          <a:xfrm>
-            <a:off x="9418320" y="3703320"/>
-            <a:ext cx="1097280" cy="256032"/>
-          </a:xfrm>
-          <a:prstGeom prst="roundRect">
-            <a:avLst/>
-          </a:prstGeom>
-          <a:solidFill>
-            <a:srgbClr val="8A939B"/>
-          </a:solidFill>
-          <a:ln>
-            <a:noFill/>
-          </a:ln>
-        </p:spPr>
-        <p:style>
-          <a:lnRef idx="1">
-            <a:schemeClr val="accent1"/>
-          </a:lnRef>
-          <a:fillRef idx="3">
-            <a:schemeClr val="accent1"/>
-          </a:fillRef>
-          <a:effectRef idx="2">
-            <a:schemeClr val="accent1"/>
-          </a:effectRef>
-          <a:fontRef idx="minor">
-            <a:schemeClr val="lt1"/>
-          </a:fontRef>
-        </p:style>
-        <p:txBody>
-          <a:bodyPr rtlCol="0" anchor="ctr"/>
-          <a:lstStyle/>
-          <a:p>
-            <a:pPr algn="ctr"/>
-          </a:p>
-        </p:txBody>
-      </p:sp>
-      <p:sp>
-        <p:nvSpPr>
-          <p:cNvPr id="37" name="TextBox 36"/>
-          <p:cNvSpPr txBox="1"/>
-          <p:nvPr/>
-        </p:nvSpPr>
-        <p:spPr>
-          <a:xfrm>
-            <a:off x="9418320" y="3703320"/>
-            <a:ext cx="1097280" cy="256032"/>
-          </a:xfrm>
-          <a:prstGeom prst="rect">
-            <a:avLst/>
-          </a:prstGeom>
-          <a:noFill/>
-        </p:spPr>
-        <p:txBody>
-          <a:bodyPr wrap="square" anchor="ctr"/>
-          <a:lstStyle/>
-          <a:p>
-            <a:pPr algn="ctr"/>
-            <a:r>
-              <a:rPr sz="800" b="1" i="0">
-                <a:solidFill>
-                  <a:srgbClr val="1D252C"/>
-                </a:solidFill>
-                <a:latin typeface="Segoe UI"/>
-              </a:rPr>
-              <a:t>PLANNED</a:t>
-            </a:r>
-          </a:p>
-        </p:txBody>
-      </p:sp>
-      <p:sp>
-        <p:nvSpPr>
-          <p:cNvPr id="38" name="Rounded Rectangle 37"/>
-          <p:cNvSpPr/>
-          <p:nvPr/>
-        </p:nvSpPr>
-        <p:spPr>
-          <a:xfrm>
-            <a:off x="457200" y="4389120"/>
-            <a:ext cx="11155680" cy="1280160"/>
-          </a:xfrm>
-          <a:prstGeom prst="roundRect">
-            <a:avLst/>
-          </a:prstGeom>
-          <a:solidFill>
-            <a:srgbClr val="242F39"/>
-          </a:solidFill>
-          <a:ln w="12700">
-            <a:solidFill>
-              <a:srgbClr val="007565"/>
-            </a:solidFill>
-          </a:ln>
-        </p:spPr>
-        <p:style>
-          <a:lnRef idx="1">
-            <a:schemeClr val="accent1"/>
-          </a:lnRef>
-          <a:fillRef idx="3">
-            <a:schemeClr val="accent1"/>
-          </a:fillRef>
-          <a:effectRef idx="2">
-            <a:schemeClr val="accent1"/>
-          </a:effectRef>
-          <a:fontRef idx="minor">
-            <a:schemeClr val="lt1"/>
-          </a:fontRef>
-        </p:style>
-        <p:txBody>
-          <a:bodyPr rtlCol="0" anchor="ctr"/>
-          <a:lstStyle/>
-          <a:p>
-            <a:pPr algn="ctr"/>
-          </a:p>
-        </p:txBody>
-      </p:sp>
-      <p:sp>
-        <p:nvSpPr>
-          <p:cNvPr id="39" name="Rectangle 38"/>
-          <p:cNvSpPr/>
-          <p:nvPr/>
-        </p:nvSpPr>
-        <p:spPr>
-          <a:xfrm>
-            <a:off x="457200" y="4389120"/>
-            <a:ext cx="11155680" cy="54864"/>
-          </a:xfrm>
-          <a:prstGeom prst="rect">
-            <a:avLst/>
-          </a:prstGeom>
-          <a:solidFill>
-            <a:srgbClr val="007565"/>
-          </a:solidFill>
-          <a:ln>
-            <a:noFill/>
-          </a:ln>
-        </p:spPr>
-        <p:style>
-          <a:lnRef idx="1">
-            <a:schemeClr val="accent1"/>
-          </a:lnRef>
-          <a:fillRef idx="3">
-            <a:schemeClr val="accent1"/>
-          </a:fillRef>
-          <a:effectRef idx="2">
-            <a:schemeClr val="accent1"/>
-          </a:effectRef>
-          <a:fontRef idx="minor">
-            <a:schemeClr val="lt1"/>
-          </a:fontRef>
-        </p:style>
-        <p:txBody>
-          <a:bodyPr rtlCol="0" anchor="ctr"/>
-          <a:lstStyle/>
-          <a:p>
-            <a:pPr algn="ctr"/>
-          </a:p>
-        </p:txBody>
-      </p:sp>
-      <p:sp>
-        <p:nvSpPr>
-          <p:cNvPr id="40" name="TextBox 39"/>
-          <p:cNvSpPr txBox="1"/>
-          <p:nvPr/>
-        </p:nvSpPr>
-        <p:spPr>
-          <a:xfrm>
-            <a:off x="731520" y="4526280"/>
-            <a:ext cx="10607040" cy="365760"/>
-          </a:xfrm>
-          <a:prstGeom prst="rect">
-            <a:avLst/>
-          </a:prstGeom>
-          <a:noFill/>
-        </p:spPr>
-        <p:txBody>
-          <a:bodyPr wrap="square" anchor="t"/>
-          <a:lstStyle/>
-          <a:p>
-            <a:pPr algn="l"/>
-            <a:r>
-              <a:rPr sz="1600" b="1" i="0">
-                <a:solidFill>
-                  <a:srgbClr val="009E8A"/>
-                </a:solidFill>
-                <a:latin typeface="Segoe UI"/>
-              </a:rPr>
-              <a:t>What We Need</a:t>
-            </a:r>
-          </a:p>
-        </p:txBody>
-      </p:sp>
-      <p:sp>
-        <p:nvSpPr>
-          <p:cNvPr id="41" name="TextBox 40"/>
-          <p:cNvSpPr txBox="1"/>
-          <p:nvPr/>
-        </p:nvSpPr>
-        <p:spPr>
-          <a:xfrm>
-            <a:off x="731520" y="4937760"/>
-            <a:ext cx="10607040" cy="731520"/>
-          </a:xfrm>
-          <a:prstGeom prst="rect">
-            <a:avLst/>
-          </a:prstGeom>
-          <a:noFill/>
-        </p:spPr>
-        <p:txBody>
-          <a:bodyPr wrap="square"/>
-          <a:lstStyle/>
-          <a:p>
-            <a:pPr algn="l">
-              <a:spcAft>
-                <a:spcPts val="400"/>
-              </a:spcAft>
-            </a:pPr>
-            <a:r>
-              <a:rPr sz="1100" b="0">
-                <a:solidFill>
-                  <a:srgbClr val="F2F4F5"/>
-                </a:solidFill>
-                <a:latin typeface="Segoe UI"/>
-              </a:rPr>
-              <a:t>▸  Approval to proceed with hardware collection from IT decommission inventory</a:t>
-            </a:r>
-          </a:p>
-          <a:p>
-            <a:pPr algn="l">
-              <a:spcAft>
-                <a:spcPts val="400"/>
-              </a:spcAft>
-            </a:pPr>
-            <a:r>
-              <a:rPr sz="1100" b="0">
-                <a:solidFill>
-                  <a:srgbClr val="F2F4F5"/>
-                </a:solidFill>
-                <a:latin typeface="Segoe UI"/>
-              </a:rPr>
-              <a:t>▸  Coordination with Go4Labs team for network port mapping integration</a:t>
-            </a:r>
-          </a:p>
-          <a:p>
-            <a:pPr algn="l">
-              <a:spcAft>
-                <a:spcPts val="400"/>
-              </a:spcAft>
-            </a:pPr>
-            <a:r>
-              <a:rPr sz="1100" b="0">
-                <a:solidFill>
-                  <a:srgbClr val="F2F4F5"/>
-                </a:solidFill>
-                <a:latin typeface="Segoe UI"/>
-              </a:rPr>
-              <a:t>▸  Stakeholder buy-in from team leads for onboarding and golden image requirements</a:t>
-            </a:r>
-          </a:p>
-        </p:txBody>
-      </p:sp>
-      <p:sp>
-        <p:nvSpPr>
-          <p:cNvPr id="42" name="Rounded Rectangle 41"/>
-          <p:cNvSpPr/>
-          <p:nvPr/>
-        </p:nvSpPr>
-        <p:spPr>
-          <a:xfrm>
-            <a:off x="457200" y="5943600"/>
-            <a:ext cx="11155680" cy="502920"/>
-          </a:xfrm>
-          <a:prstGeom prst="roundRect">
-            <a:avLst/>
-          </a:prstGeom>
-          <a:solidFill>
-            <a:srgbClr val="005C50"/>
-          </a:solidFill>
-          <a:ln w="12700">
-            <a:solidFill>
-              <a:srgbClr val="007565"/>
-            </a:solidFill>
-          </a:ln>
-        </p:spPr>
-        <p:style>
-          <a:lnRef idx="1">
-            <a:schemeClr val="accent1"/>
-          </a:lnRef>
-          <a:fillRef idx="3">
-            <a:schemeClr val="accent1"/>
-          </a:fillRef>
-          <a:effectRef idx="2">
-            <a:schemeClr val="accent1"/>
-          </a:effectRef>
-          <a:fontRef idx="minor">
-            <a:schemeClr val="lt1"/>
-          </a:fontRef>
-        </p:style>
-        <p:txBody>
-          <a:bodyPr rtlCol="0" anchor="ctr"/>
-          <a:lstStyle/>
-          <a:p>
-            <a:pPr algn="ctr"/>
-          </a:p>
-        </p:txBody>
-      </p:sp>
-      <p:sp>
-        <p:nvSpPr>
-          <p:cNvPr id="43" name="TextBox 42"/>
-          <p:cNvSpPr txBox="1"/>
-          <p:nvPr/>
-        </p:nvSpPr>
-        <p:spPr>
-          <a:xfrm>
-            <a:off x="640080" y="5989320"/>
-            <a:ext cx="10789920" cy="411480"/>
-          </a:xfrm>
-          <a:prstGeom prst="rect">
-            <a:avLst/>
-          </a:prstGeom>
-          <a:noFill/>
-        </p:spPr>
-        <p:txBody>
-          <a:bodyPr wrap="square" anchor="ctr"/>
-          <a:lstStyle/>
-          <a:p>
-            <a:pPr algn="ctr"/>
-            <a:r>
-              <a:rPr sz="1300" b="1" i="0">
-                <a:solidFill>
-                  <a:srgbClr val="FFFFFF"/>
-                </a:solidFill>
-                <a:latin typeface="Segoe UI"/>
-              </a:rPr>
-              <a:t>FP MAppleLab is ready to scale — let's bring native macOS access to every team that needs it</a:t>
-            </a:r>
-          </a:p>
-        </p:txBody>
-      </p:sp>
-      <p:sp>
-        <p:nvSpPr>
-          <p:cNvPr id="44" name="Rectangle 43"/>
-          <p:cNvSpPr/>
-          <p:nvPr/>
-        </p:nvSpPr>
-        <p:spPr>
-          <a:xfrm>
-            <a:off x="0" y="6528816"/>
-            <a:ext cx="12188952" cy="329184"/>
-          </a:xfrm>
-          <a:prstGeom prst="rect">
-            <a:avLst/>
-          </a:prstGeom>
-          <a:solidFill>
-            <a:srgbClr val="005C50"/>
-          </a:solidFill>
-          <a:ln>
-            <a:noFill/>
-          </a:ln>
-        </p:spPr>
-        <p:style>
-          <a:lnRef idx="1">
-            <a:schemeClr val="accent1"/>
-          </a:lnRef>
-          <a:fillRef idx="3">
-            <a:schemeClr val="accent1"/>
-          </a:fillRef>
-          <a:effectRef idx="2">
-            <a:schemeClr val="accent1"/>
-          </a:effectRef>
-          <a:fontRef idx="minor">
-            <a:schemeClr val="lt1"/>
-          </a:fontRef>
-        </p:style>
-        <p:txBody>
-          <a:bodyPr rtlCol="0" anchor="ctr"/>
-          <a:lstStyle/>
-          <a:p>
-            <a:pPr algn="ctr"/>
-          </a:p>
-        </p:txBody>
-      </p:sp>
-      <p:sp>
-        <p:nvSpPr>
-          <p:cNvPr id="45" name="TextBox 44"/>
           <p:cNvSpPr txBox="1"/>
           <p:nvPr/>
         </p:nvSpPr>
@@ -17877,7 +17878,7 @@
         <p:spPr>
           <a:xfrm>
             <a:off x="0" y="0"/>
-            <a:ext cx="320040" cy="6858000"/>
+            <a:ext cx="12188952" cy="54864"/>
           </a:xfrm>
           <a:prstGeom prst="rect">
             <a:avLst/>
@@ -17913,23 +17914,91 @@
       </p:sp>
       <p:sp>
         <p:nvSpPr>
-          <p:cNvPr id="4" name="Rectangle 3"/>
+          <p:cNvPr id="4" name="TextBox 3"/>
+          <p:cNvSpPr txBox="1"/>
+          <p:nvPr/>
+        </p:nvSpPr>
+        <p:spPr>
+          <a:xfrm>
+            <a:off x="548640" y="228600"/>
+            <a:ext cx="10058400" cy="548640"/>
+          </a:xfrm>
+          <a:prstGeom prst="rect">
+            <a:avLst/>
+          </a:prstGeom>
+          <a:noFill/>
+        </p:spPr>
+        <p:txBody>
+          <a:bodyPr wrap="square" anchor="t"/>
+          <a:lstStyle/>
+          <a:p>
+            <a:pPr algn="l"/>
+            <a:r>
+              <a:rPr sz="2800" b="1" i="0">
+                <a:solidFill>
+                  <a:srgbClr val="FFFFFF"/>
+                </a:solidFill>
+                <a:latin typeface="Segoe UI"/>
+              </a:rPr>
+              <a:t>Next Steps: Scaling FP MAppleLab Across Forcepoint</a:t>
+            </a:r>
+          </a:p>
+        </p:txBody>
+      </p:sp>
+      <p:sp>
+        <p:nvSpPr>
+          <p:cNvPr id="5" name="TextBox 4"/>
+          <p:cNvSpPr txBox="1"/>
+          <p:nvPr/>
+        </p:nvSpPr>
+        <p:spPr>
+          <a:xfrm>
+            <a:off x="548640" y="749808"/>
+            <a:ext cx="10058400" cy="365760"/>
+          </a:xfrm>
+          <a:prstGeom prst="rect">
+            <a:avLst/>
+          </a:prstGeom>
+          <a:noFill/>
+        </p:spPr>
+        <p:txBody>
+          <a:bodyPr wrap="square" anchor="t"/>
+          <a:lstStyle/>
+          <a:p>
+            <a:pPr algn="l"/>
+            <a:r>
+              <a:rPr sz="1400" b="0" i="0">
+                <a:solidFill>
+                  <a:srgbClr val="009E8A"/>
+                </a:solidFill>
+                <a:latin typeface="Segoe UI"/>
+              </a:rPr>
+              <a:t>From pilot to production — a clear path forward</a:t>
+            </a:r>
+          </a:p>
+        </p:txBody>
+      </p:sp>
+      <p:sp>
+        <p:nvSpPr>
+          <p:cNvPr id="6" name="Rounded Rectangle 5"/>
           <p:cNvSpPr/>
           <p:nvPr/>
         </p:nvSpPr>
         <p:spPr>
           <a:xfrm>
-            <a:off x="0" y="0"/>
-            <a:ext cx="12188952" cy="54864"/>
-          </a:xfrm>
-          <a:prstGeom prst="rect">
-            <a:avLst/>
-          </a:prstGeom>
-          <a:solidFill>
-            <a:srgbClr val="007565"/>
-          </a:solidFill>
-          <a:ln>
-            <a:noFill/>
+            <a:off x="457200" y="1371600"/>
+            <a:ext cx="2560320" cy="2743200"/>
+          </a:xfrm>
+          <a:prstGeom prst="roundRect">
+            <a:avLst/>
+          </a:prstGeom>
+          <a:solidFill>
+            <a:srgbClr val="242F39"/>
+          </a:solidFill>
+          <a:ln w="12700">
+            <a:solidFill>
+              <a:srgbClr val="007565"/>
+            </a:solidFill>
           </a:ln>
         </p:spPr>
         <p:style>
@@ -17956,6 +18025,1680 @@
       </p:sp>
       <p:sp>
         <p:nvSpPr>
+          <p:cNvPr id="7" name="Rectangle 6"/>
+          <p:cNvSpPr/>
+          <p:nvPr/>
+        </p:nvSpPr>
+        <p:spPr>
+          <a:xfrm>
+            <a:off x="457200" y="1371600"/>
+            <a:ext cx="2560320" cy="54864"/>
+          </a:xfrm>
+          <a:prstGeom prst="rect">
+            <a:avLst/>
+          </a:prstGeom>
+          <a:solidFill>
+            <a:srgbClr val="007565"/>
+          </a:solidFill>
+          <a:ln>
+            <a:noFill/>
+          </a:ln>
+        </p:spPr>
+        <p:style>
+          <a:lnRef idx="1">
+            <a:schemeClr val="accent1"/>
+          </a:lnRef>
+          <a:fillRef idx="3">
+            <a:schemeClr val="accent1"/>
+          </a:fillRef>
+          <a:effectRef idx="2">
+            <a:schemeClr val="accent1"/>
+          </a:effectRef>
+          <a:fontRef idx="minor">
+            <a:schemeClr val="lt1"/>
+          </a:fontRef>
+        </p:style>
+        <p:txBody>
+          <a:bodyPr rtlCol="0" anchor="ctr"/>
+          <a:lstStyle/>
+          <a:p>
+            <a:pPr algn="ctr"/>
+          </a:p>
+        </p:txBody>
+      </p:sp>
+      <p:sp>
+        <p:nvSpPr>
+          <p:cNvPr id="8" name="Oval 7"/>
+          <p:cNvSpPr/>
+          <p:nvPr/>
+        </p:nvSpPr>
+        <p:spPr>
+          <a:xfrm>
+            <a:off x="1463040" y="1554480"/>
+            <a:ext cx="502920" cy="502920"/>
+          </a:xfrm>
+          <a:prstGeom prst="ellipse">
+            <a:avLst/>
+          </a:prstGeom>
+          <a:solidFill>
+            <a:srgbClr val="007565"/>
+          </a:solidFill>
+          <a:ln>
+            <a:noFill/>
+          </a:ln>
+        </p:spPr>
+        <p:style>
+          <a:lnRef idx="1">
+            <a:schemeClr val="accent1"/>
+          </a:lnRef>
+          <a:fillRef idx="3">
+            <a:schemeClr val="accent1"/>
+          </a:fillRef>
+          <a:effectRef idx="2">
+            <a:schemeClr val="accent1"/>
+          </a:effectRef>
+          <a:fontRef idx="minor">
+            <a:schemeClr val="lt1"/>
+          </a:fontRef>
+        </p:style>
+        <p:txBody>
+          <a:bodyPr rtlCol="0" anchor="ctr"/>
+          <a:lstStyle/>
+          <a:p>
+            <a:pPr algn="ctr"/>
+          </a:p>
+        </p:txBody>
+      </p:sp>
+      <p:sp>
+        <p:nvSpPr>
+          <p:cNvPr id="9" name="TextBox 8"/>
+          <p:cNvSpPr txBox="1"/>
+          <p:nvPr/>
+        </p:nvSpPr>
+        <p:spPr>
+          <a:xfrm>
+            <a:off x="1463040" y="1554480"/>
+            <a:ext cx="502920" cy="502920"/>
+          </a:xfrm>
+          <a:prstGeom prst="rect">
+            <a:avLst/>
+          </a:prstGeom>
+          <a:noFill/>
+        </p:spPr>
+        <p:txBody>
+          <a:bodyPr wrap="square" anchor="ctr"/>
+          <a:lstStyle/>
+          <a:p>
+            <a:pPr algn="ctr"/>
+            <a:r>
+              <a:rPr sz="1800" b="1" i="0">
+                <a:solidFill>
+                  <a:srgbClr val="1D252C"/>
+                </a:solidFill>
+                <a:latin typeface="Segoe UI"/>
+              </a:rPr>
+              <a:t>01</a:t>
+            </a:r>
+          </a:p>
+        </p:txBody>
+      </p:sp>
+      <p:sp>
+        <p:nvSpPr>
+          <p:cNvPr id="10" name="TextBox 9"/>
+          <p:cNvSpPr txBox="1"/>
+          <p:nvPr/>
+        </p:nvSpPr>
+        <p:spPr>
+          <a:xfrm>
+            <a:off x="594360" y="2148840"/>
+            <a:ext cx="2286000" cy="320040"/>
+          </a:xfrm>
+          <a:prstGeom prst="rect">
+            <a:avLst/>
+          </a:prstGeom>
+          <a:noFill/>
+        </p:spPr>
+        <p:txBody>
+          <a:bodyPr wrap="square" anchor="t"/>
+          <a:lstStyle/>
+          <a:p>
+            <a:pPr algn="ctr"/>
+            <a:r>
+              <a:rPr sz="1400" b="1" i="0">
+                <a:solidFill>
+                  <a:srgbClr val="007565"/>
+                </a:solidFill>
+                <a:latin typeface="Segoe UI"/>
+              </a:rPr>
+              <a:t>Pilot Validation</a:t>
+            </a:r>
+          </a:p>
+        </p:txBody>
+      </p:sp>
+      <p:sp>
+        <p:nvSpPr>
+          <p:cNvPr id="11" name="TextBox 10"/>
+          <p:cNvSpPr txBox="1"/>
+          <p:nvPr/>
+        </p:nvSpPr>
+        <p:spPr>
+          <a:xfrm>
+            <a:off x="594360" y="2514600"/>
+            <a:ext cx="2286000" cy="914400"/>
+          </a:xfrm>
+          <a:prstGeom prst="rect">
+            <a:avLst/>
+          </a:prstGeom>
+          <a:noFill/>
+        </p:spPr>
+        <p:txBody>
+          <a:bodyPr wrap="square" anchor="t"/>
+          <a:lstStyle/>
+          <a:p>
+            <a:pPr algn="ctr"/>
+            <a:r>
+              <a:rPr sz="1000" b="0" i="0">
+                <a:solidFill>
+                  <a:srgbClr val="F2F4F5"/>
+                </a:solidFill>
+                <a:latin typeface="Segoe UI"/>
+              </a:rPr>
+              <a:t>Current deployment proves concept with real
+users across TS, PS, and engineering teams.</a:t>
+            </a:r>
+          </a:p>
+        </p:txBody>
+      </p:sp>
+      <p:sp>
+        <p:nvSpPr>
+          <p:cNvPr id="12" name="Rounded Rectangle 11"/>
+          <p:cNvSpPr/>
+          <p:nvPr/>
+        </p:nvSpPr>
+        <p:spPr>
+          <a:xfrm>
+            <a:off x="1188720" y="3703320"/>
+            <a:ext cx="1097280" cy="256032"/>
+          </a:xfrm>
+          <a:prstGeom prst="roundRect">
+            <a:avLst/>
+          </a:prstGeom>
+          <a:solidFill>
+            <a:srgbClr val="2ECC71"/>
+          </a:solidFill>
+          <a:ln>
+            <a:noFill/>
+          </a:ln>
+        </p:spPr>
+        <p:style>
+          <a:lnRef idx="1">
+            <a:schemeClr val="accent1"/>
+          </a:lnRef>
+          <a:fillRef idx="3">
+            <a:schemeClr val="accent1"/>
+          </a:fillRef>
+          <a:effectRef idx="2">
+            <a:schemeClr val="accent1"/>
+          </a:effectRef>
+          <a:fontRef idx="minor">
+            <a:schemeClr val="lt1"/>
+          </a:fontRef>
+        </p:style>
+        <p:txBody>
+          <a:bodyPr rtlCol="0" anchor="ctr"/>
+          <a:lstStyle/>
+          <a:p>
+            <a:pPr algn="ctr"/>
+          </a:p>
+        </p:txBody>
+      </p:sp>
+      <p:sp>
+        <p:nvSpPr>
+          <p:cNvPr id="13" name="TextBox 12"/>
+          <p:cNvSpPr txBox="1"/>
+          <p:nvPr/>
+        </p:nvSpPr>
+        <p:spPr>
+          <a:xfrm>
+            <a:off x="1188720" y="3703320"/>
+            <a:ext cx="1097280" cy="256032"/>
+          </a:xfrm>
+          <a:prstGeom prst="rect">
+            <a:avLst/>
+          </a:prstGeom>
+          <a:noFill/>
+        </p:spPr>
+        <p:txBody>
+          <a:bodyPr wrap="square" anchor="ctr"/>
+          <a:lstStyle/>
+          <a:p>
+            <a:pPr algn="ctr"/>
+            <a:r>
+              <a:rPr sz="800" b="1" i="0">
+                <a:solidFill>
+                  <a:srgbClr val="1D252C"/>
+                </a:solidFill>
+                <a:latin typeface="Segoe UI"/>
+              </a:rPr>
+              <a:t>COMPLETE</a:t>
+            </a:r>
+          </a:p>
+        </p:txBody>
+      </p:sp>
+      <p:sp>
+        <p:nvSpPr>
+          <p:cNvPr id="14" name="Rounded Rectangle 13"/>
+          <p:cNvSpPr/>
+          <p:nvPr/>
+        </p:nvSpPr>
+        <p:spPr>
+          <a:xfrm>
+            <a:off x="3200400" y="1371600"/>
+            <a:ext cx="2560320" cy="2743200"/>
+          </a:xfrm>
+          <a:prstGeom prst="roundRect">
+            <a:avLst/>
+          </a:prstGeom>
+          <a:solidFill>
+            <a:srgbClr val="242F39"/>
+          </a:solidFill>
+          <a:ln w="12700">
+            <a:solidFill>
+              <a:srgbClr val="006DAA"/>
+            </a:solidFill>
+          </a:ln>
+        </p:spPr>
+        <p:style>
+          <a:lnRef idx="1">
+            <a:schemeClr val="accent1"/>
+          </a:lnRef>
+          <a:fillRef idx="3">
+            <a:schemeClr val="accent1"/>
+          </a:fillRef>
+          <a:effectRef idx="2">
+            <a:schemeClr val="accent1"/>
+          </a:effectRef>
+          <a:fontRef idx="minor">
+            <a:schemeClr val="lt1"/>
+          </a:fontRef>
+        </p:style>
+        <p:txBody>
+          <a:bodyPr rtlCol="0" anchor="ctr"/>
+          <a:lstStyle/>
+          <a:p>
+            <a:pPr algn="ctr"/>
+          </a:p>
+        </p:txBody>
+      </p:sp>
+      <p:sp>
+        <p:nvSpPr>
+          <p:cNvPr id="15" name="Rectangle 14"/>
+          <p:cNvSpPr/>
+          <p:nvPr/>
+        </p:nvSpPr>
+        <p:spPr>
+          <a:xfrm>
+            <a:off x="3200400" y="1371600"/>
+            <a:ext cx="2560320" cy="54864"/>
+          </a:xfrm>
+          <a:prstGeom prst="rect">
+            <a:avLst/>
+          </a:prstGeom>
+          <a:solidFill>
+            <a:srgbClr val="006DAA"/>
+          </a:solidFill>
+          <a:ln>
+            <a:noFill/>
+          </a:ln>
+        </p:spPr>
+        <p:style>
+          <a:lnRef idx="1">
+            <a:schemeClr val="accent1"/>
+          </a:lnRef>
+          <a:fillRef idx="3">
+            <a:schemeClr val="accent1"/>
+          </a:fillRef>
+          <a:effectRef idx="2">
+            <a:schemeClr val="accent1"/>
+          </a:effectRef>
+          <a:fontRef idx="minor">
+            <a:schemeClr val="lt1"/>
+          </a:fontRef>
+        </p:style>
+        <p:txBody>
+          <a:bodyPr rtlCol="0" anchor="ctr"/>
+          <a:lstStyle/>
+          <a:p>
+            <a:pPr algn="ctr"/>
+          </a:p>
+        </p:txBody>
+      </p:sp>
+      <p:sp>
+        <p:nvSpPr>
+          <p:cNvPr id="16" name="Oval 15"/>
+          <p:cNvSpPr/>
+          <p:nvPr/>
+        </p:nvSpPr>
+        <p:spPr>
+          <a:xfrm>
+            <a:off x="4206240" y="1554480"/>
+            <a:ext cx="502920" cy="502920"/>
+          </a:xfrm>
+          <a:prstGeom prst="ellipse">
+            <a:avLst/>
+          </a:prstGeom>
+          <a:solidFill>
+            <a:srgbClr val="006DAA"/>
+          </a:solidFill>
+          <a:ln>
+            <a:noFill/>
+          </a:ln>
+        </p:spPr>
+        <p:style>
+          <a:lnRef idx="1">
+            <a:schemeClr val="accent1"/>
+          </a:lnRef>
+          <a:fillRef idx="3">
+            <a:schemeClr val="accent1"/>
+          </a:fillRef>
+          <a:effectRef idx="2">
+            <a:schemeClr val="accent1"/>
+          </a:effectRef>
+          <a:fontRef idx="minor">
+            <a:schemeClr val="lt1"/>
+          </a:fontRef>
+        </p:style>
+        <p:txBody>
+          <a:bodyPr rtlCol="0" anchor="ctr"/>
+          <a:lstStyle/>
+          <a:p>
+            <a:pPr algn="ctr"/>
+          </a:p>
+        </p:txBody>
+      </p:sp>
+      <p:sp>
+        <p:nvSpPr>
+          <p:cNvPr id="17" name="TextBox 16"/>
+          <p:cNvSpPr txBox="1"/>
+          <p:nvPr/>
+        </p:nvSpPr>
+        <p:spPr>
+          <a:xfrm>
+            <a:off x="4206240" y="1554480"/>
+            <a:ext cx="502920" cy="502920"/>
+          </a:xfrm>
+          <a:prstGeom prst="rect">
+            <a:avLst/>
+          </a:prstGeom>
+          <a:noFill/>
+        </p:spPr>
+        <p:txBody>
+          <a:bodyPr wrap="square" anchor="ctr"/>
+          <a:lstStyle/>
+          <a:p>
+            <a:pPr algn="ctr"/>
+            <a:r>
+              <a:rPr sz="1800" b="1" i="0">
+                <a:solidFill>
+                  <a:srgbClr val="1D252C"/>
+                </a:solidFill>
+                <a:latin typeface="Segoe UI"/>
+              </a:rPr>
+              <a:t>02</a:t>
+            </a:r>
+          </a:p>
+        </p:txBody>
+      </p:sp>
+      <p:sp>
+        <p:nvSpPr>
+          <p:cNvPr id="18" name="TextBox 17"/>
+          <p:cNvSpPr txBox="1"/>
+          <p:nvPr/>
+        </p:nvSpPr>
+        <p:spPr>
+          <a:xfrm>
+            <a:off x="3337560" y="2148840"/>
+            <a:ext cx="2286000" cy="320040"/>
+          </a:xfrm>
+          <a:prstGeom prst="rect">
+            <a:avLst/>
+          </a:prstGeom>
+          <a:noFill/>
+        </p:spPr>
+        <p:txBody>
+          <a:bodyPr wrap="square" anchor="t"/>
+          <a:lstStyle/>
+          <a:p>
+            <a:pPr algn="ctr"/>
+            <a:r>
+              <a:rPr sz="1400" b="1" i="0">
+                <a:solidFill>
+                  <a:srgbClr val="006DAA"/>
+                </a:solidFill>
+                <a:latin typeface="Segoe UI"/>
+              </a:rPr>
+              <a:t>Hardware Collection</a:t>
+            </a:r>
+          </a:p>
+        </p:txBody>
+      </p:sp>
+      <p:sp>
+        <p:nvSpPr>
+          <p:cNvPr id="19" name="TextBox 18"/>
+          <p:cNvSpPr txBox="1"/>
+          <p:nvPr/>
+        </p:nvSpPr>
+        <p:spPr>
+          <a:xfrm>
+            <a:off x="3337560" y="2514600"/>
+            <a:ext cx="2286000" cy="914400"/>
+          </a:xfrm>
+          <a:prstGeom prst="rect">
+            <a:avLst/>
+          </a:prstGeom>
+          <a:noFill/>
+        </p:spPr>
+        <p:txBody>
+          <a:bodyPr wrap="square" anchor="t"/>
+          <a:lstStyle/>
+          <a:p>
+            <a:pPr algn="ctr"/>
+            <a:r>
+              <a:rPr sz="1000" b="0" i="0">
+                <a:solidFill>
+                  <a:srgbClr val="F2F4F5"/>
+                </a:solidFill>
+                <a:latin typeface="Segoe UI"/>
+              </a:rPr>
+              <a:t>Identify and collect decommissioned Mac Mini
+and MacBook Pro units from IT inventory.</a:t>
+            </a:r>
+          </a:p>
+        </p:txBody>
+      </p:sp>
+      <p:sp>
+        <p:nvSpPr>
+          <p:cNvPr id="20" name="Rounded Rectangle 19"/>
+          <p:cNvSpPr/>
+          <p:nvPr/>
+        </p:nvSpPr>
+        <p:spPr>
+          <a:xfrm>
+            <a:off x="3931920" y="3703320"/>
+            <a:ext cx="1097280" cy="256032"/>
+          </a:xfrm>
+          <a:prstGeom prst="roundRect">
+            <a:avLst/>
+          </a:prstGeom>
+          <a:solidFill>
+            <a:srgbClr val="F5A623"/>
+          </a:solidFill>
+          <a:ln>
+            <a:noFill/>
+          </a:ln>
+        </p:spPr>
+        <p:style>
+          <a:lnRef idx="1">
+            <a:schemeClr val="accent1"/>
+          </a:lnRef>
+          <a:fillRef idx="3">
+            <a:schemeClr val="accent1"/>
+          </a:fillRef>
+          <a:effectRef idx="2">
+            <a:schemeClr val="accent1"/>
+          </a:effectRef>
+          <a:fontRef idx="minor">
+            <a:schemeClr val="lt1"/>
+          </a:fontRef>
+        </p:style>
+        <p:txBody>
+          <a:bodyPr rtlCol="0" anchor="ctr"/>
+          <a:lstStyle/>
+          <a:p>
+            <a:pPr algn="ctr"/>
+          </a:p>
+        </p:txBody>
+      </p:sp>
+      <p:sp>
+        <p:nvSpPr>
+          <p:cNvPr id="21" name="TextBox 20"/>
+          <p:cNvSpPr txBox="1"/>
+          <p:nvPr/>
+        </p:nvSpPr>
+        <p:spPr>
+          <a:xfrm>
+            <a:off x="3931920" y="3703320"/>
+            <a:ext cx="1097280" cy="256032"/>
+          </a:xfrm>
+          <a:prstGeom prst="rect">
+            <a:avLst/>
+          </a:prstGeom>
+          <a:noFill/>
+        </p:spPr>
+        <p:txBody>
+          <a:bodyPr wrap="square" anchor="ctr"/>
+          <a:lstStyle/>
+          <a:p>
+            <a:pPr algn="ctr"/>
+            <a:r>
+              <a:rPr sz="800" b="1" i="0">
+                <a:solidFill>
+                  <a:srgbClr val="1D252C"/>
+                </a:solidFill>
+                <a:latin typeface="Segoe UI"/>
+              </a:rPr>
+              <a:t>IN PROGRESS</a:t>
+            </a:r>
+          </a:p>
+        </p:txBody>
+      </p:sp>
+      <p:sp>
+        <p:nvSpPr>
+          <p:cNvPr id="22" name="Rounded Rectangle 21"/>
+          <p:cNvSpPr/>
+          <p:nvPr/>
+        </p:nvSpPr>
+        <p:spPr>
+          <a:xfrm>
+            <a:off x="5943600" y="1371600"/>
+            <a:ext cx="2560320" cy="2743200"/>
+          </a:xfrm>
+          <a:prstGeom prst="roundRect">
+            <a:avLst/>
+          </a:prstGeom>
+          <a:solidFill>
+            <a:srgbClr val="242F39"/>
+          </a:solidFill>
+          <a:ln w="12700">
+            <a:solidFill>
+              <a:srgbClr val="F5A623"/>
+            </a:solidFill>
+          </a:ln>
+        </p:spPr>
+        <p:style>
+          <a:lnRef idx="1">
+            <a:schemeClr val="accent1"/>
+          </a:lnRef>
+          <a:fillRef idx="3">
+            <a:schemeClr val="accent1"/>
+          </a:fillRef>
+          <a:effectRef idx="2">
+            <a:schemeClr val="accent1"/>
+          </a:effectRef>
+          <a:fontRef idx="minor">
+            <a:schemeClr val="lt1"/>
+          </a:fontRef>
+        </p:style>
+        <p:txBody>
+          <a:bodyPr rtlCol="0" anchor="ctr"/>
+          <a:lstStyle/>
+          <a:p>
+            <a:pPr algn="ctr"/>
+          </a:p>
+        </p:txBody>
+      </p:sp>
+      <p:sp>
+        <p:nvSpPr>
+          <p:cNvPr id="23" name="Rectangle 22"/>
+          <p:cNvSpPr/>
+          <p:nvPr/>
+        </p:nvSpPr>
+        <p:spPr>
+          <a:xfrm>
+            <a:off x="5943600" y="1371600"/>
+            <a:ext cx="2560320" cy="54864"/>
+          </a:xfrm>
+          <a:prstGeom prst="rect">
+            <a:avLst/>
+          </a:prstGeom>
+          <a:solidFill>
+            <a:srgbClr val="F5A623"/>
+          </a:solidFill>
+          <a:ln>
+            <a:noFill/>
+          </a:ln>
+        </p:spPr>
+        <p:style>
+          <a:lnRef idx="1">
+            <a:schemeClr val="accent1"/>
+          </a:lnRef>
+          <a:fillRef idx="3">
+            <a:schemeClr val="accent1"/>
+          </a:fillRef>
+          <a:effectRef idx="2">
+            <a:schemeClr val="accent1"/>
+          </a:effectRef>
+          <a:fontRef idx="minor">
+            <a:schemeClr val="lt1"/>
+          </a:fontRef>
+        </p:style>
+        <p:txBody>
+          <a:bodyPr rtlCol="0" anchor="ctr"/>
+          <a:lstStyle/>
+          <a:p>
+            <a:pPr algn="ctr"/>
+          </a:p>
+        </p:txBody>
+      </p:sp>
+      <p:sp>
+        <p:nvSpPr>
+          <p:cNvPr id="24" name="Oval 23"/>
+          <p:cNvSpPr/>
+          <p:nvPr/>
+        </p:nvSpPr>
+        <p:spPr>
+          <a:xfrm>
+            <a:off x="6949440" y="1554480"/>
+            <a:ext cx="502920" cy="502920"/>
+          </a:xfrm>
+          <a:prstGeom prst="ellipse">
+            <a:avLst/>
+          </a:prstGeom>
+          <a:solidFill>
+            <a:srgbClr val="F5A623"/>
+          </a:solidFill>
+          <a:ln>
+            <a:noFill/>
+          </a:ln>
+        </p:spPr>
+        <p:style>
+          <a:lnRef idx="1">
+            <a:schemeClr val="accent1"/>
+          </a:lnRef>
+          <a:fillRef idx="3">
+            <a:schemeClr val="accent1"/>
+          </a:fillRef>
+          <a:effectRef idx="2">
+            <a:schemeClr val="accent1"/>
+          </a:effectRef>
+          <a:fontRef idx="minor">
+            <a:schemeClr val="lt1"/>
+          </a:fontRef>
+        </p:style>
+        <p:txBody>
+          <a:bodyPr rtlCol="0" anchor="ctr"/>
+          <a:lstStyle/>
+          <a:p>
+            <a:pPr algn="ctr"/>
+          </a:p>
+        </p:txBody>
+      </p:sp>
+      <p:sp>
+        <p:nvSpPr>
+          <p:cNvPr id="25" name="TextBox 24"/>
+          <p:cNvSpPr txBox="1"/>
+          <p:nvPr/>
+        </p:nvSpPr>
+        <p:spPr>
+          <a:xfrm>
+            <a:off x="6949440" y="1554480"/>
+            <a:ext cx="502920" cy="502920"/>
+          </a:xfrm>
+          <a:prstGeom prst="rect">
+            <a:avLst/>
+          </a:prstGeom>
+          <a:noFill/>
+        </p:spPr>
+        <p:txBody>
+          <a:bodyPr wrap="square" anchor="ctr"/>
+          <a:lstStyle/>
+          <a:p>
+            <a:pPr algn="ctr"/>
+            <a:r>
+              <a:rPr sz="1800" b="1" i="0">
+                <a:solidFill>
+                  <a:srgbClr val="1D252C"/>
+                </a:solidFill>
+                <a:latin typeface="Segoe UI"/>
+              </a:rPr>
+              <a:t>03</a:t>
+            </a:r>
+          </a:p>
+        </p:txBody>
+      </p:sp>
+      <p:sp>
+        <p:nvSpPr>
+          <p:cNvPr id="26" name="TextBox 25"/>
+          <p:cNvSpPr txBox="1"/>
+          <p:nvPr/>
+        </p:nvSpPr>
+        <p:spPr>
+          <a:xfrm>
+            <a:off x="6080760" y="2148840"/>
+            <a:ext cx="2286000" cy="320040"/>
+          </a:xfrm>
+          <a:prstGeom prst="rect">
+            <a:avLst/>
+          </a:prstGeom>
+          <a:noFill/>
+        </p:spPr>
+        <p:txBody>
+          <a:bodyPr wrap="square" anchor="t"/>
+          <a:lstStyle/>
+          <a:p>
+            <a:pPr algn="ctr"/>
+            <a:r>
+              <a:rPr sz="1400" b="1" i="0">
+                <a:solidFill>
+                  <a:srgbClr val="F5A623"/>
+                </a:solidFill>
+                <a:latin typeface="Segoe UI"/>
+              </a:rPr>
+              <a:t>Cluster Expansion</a:t>
+            </a:r>
+          </a:p>
+        </p:txBody>
+      </p:sp>
+      <p:sp>
+        <p:nvSpPr>
+          <p:cNvPr id="27" name="TextBox 26"/>
+          <p:cNvSpPr txBox="1"/>
+          <p:nvPr/>
+        </p:nvSpPr>
+        <p:spPr>
+          <a:xfrm>
+            <a:off x="6080760" y="2514600"/>
+            <a:ext cx="2286000" cy="914400"/>
+          </a:xfrm>
+          <a:prstGeom prst="rect">
+            <a:avLst/>
+          </a:prstGeom>
+          <a:noFill/>
+        </p:spPr>
+        <p:txBody>
+          <a:bodyPr wrap="square" anchor="t"/>
+          <a:lstStyle/>
+          <a:p>
+            <a:pPr algn="ctr"/>
+            <a:r>
+              <a:rPr sz="1000" b="0" i="0">
+                <a:solidFill>
+                  <a:srgbClr val="F2F4F5"/>
+                </a:solidFill>
+                <a:latin typeface="Segoe UI"/>
+              </a:rPr>
+              <a:t>Deploy TART agent on collected hardware.
+Add nodes to the cluster via install script.</a:t>
+            </a:r>
+          </a:p>
+        </p:txBody>
+      </p:sp>
+      <p:sp>
+        <p:nvSpPr>
+          <p:cNvPr id="28" name="Rounded Rectangle 27"/>
+          <p:cNvSpPr/>
+          <p:nvPr/>
+        </p:nvSpPr>
+        <p:spPr>
+          <a:xfrm>
+            <a:off x="6675120" y="3703320"/>
+            <a:ext cx="1097280" cy="256032"/>
+          </a:xfrm>
+          <a:prstGeom prst="roundRect">
+            <a:avLst/>
+          </a:prstGeom>
+          <a:solidFill>
+            <a:srgbClr val="006DAA"/>
+          </a:solidFill>
+          <a:ln>
+            <a:noFill/>
+          </a:ln>
+        </p:spPr>
+        <p:style>
+          <a:lnRef idx="1">
+            <a:schemeClr val="accent1"/>
+          </a:lnRef>
+          <a:fillRef idx="3">
+            <a:schemeClr val="accent1"/>
+          </a:fillRef>
+          <a:effectRef idx="2">
+            <a:schemeClr val="accent1"/>
+          </a:effectRef>
+          <a:fontRef idx="minor">
+            <a:schemeClr val="lt1"/>
+          </a:fontRef>
+        </p:style>
+        <p:txBody>
+          <a:bodyPr rtlCol="0" anchor="ctr"/>
+          <a:lstStyle/>
+          <a:p>
+            <a:pPr algn="ctr"/>
+          </a:p>
+        </p:txBody>
+      </p:sp>
+      <p:sp>
+        <p:nvSpPr>
+          <p:cNvPr id="29" name="TextBox 28"/>
+          <p:cNvSpPr txBox="1"/>
+          <p:nvPr/>
+        </p:nvSpPr>
+        <p:spPr>
+          <a:xfrm>
+            <a:off x="6675120" y="3703320"/>
+            <a:ext cx="1097280" cy="256032"/>
+          </a:xfrm>
+          <a:prstGeom prst="rect">
+            <a:avLst/>
+          </a:prstGeom>
+          <a:noFill/>
+        </p:spPr>
+        <p:txBody>
+          <a:bodyPr wrap="square" anchor="ctr"/>
+          <a:lstStyle/>
+          <a:p>
+            <a:pPr algn="ctr"/>
+            <a:r>
+              <a:rPr sz="800" b="1" i="0">
+                <a:solidFill>
+                  <a:srgbClr val="1D252C"/>
+                </a:solidFill>
+                <a:latin typeface="Segoe UI"/>
+              </a:rPr>
+              <a:t>NEXT</a:t>
+            </a:r>
+          </a:p>
+        </p:txBody>
+      </p:sp>
+      <p:sp>
+        <p:nvSpPr>
+          <p:cNvPr id="30" name="Rounded Rectangle 29"/>
+          <p:cNvSpPr/>
+          <p:nvPr/>
+        </p:nvSpPr>
+        <p:spPr>
+          <a:xfrm>
+            <a:off x="8686800" y="1371600"/>
+            <a:ext cx="2560320" cy="2743200"/>
+          </a:xfrm>
+          <a:prstGeom prst="roundRect">
+            <a:avLst/>
+          </a:prstGeom>
+          <a:solidFill>
+            <a:srgbClr val="242F39"/>
+          </a:solidFill>
+          <a:ln w="12700">
+            <a:solidFill>
+              <a:srgbClr val="2ECC71"/>
+            </a:solidFill>
+          </a:ln>
+        </p:spPr>
+        <p:style>
+          <a:lnRef idx="1">
+            <a:schemeClr val="accent1"/>
+          </a:lnRef>
+          <a:fillRef idx="3">
+            <a:schemeClr val="accent1"/>
+          </a:fillRef>
+          <a:effectRef idx="2">
+            <a:schemeClr val="accent1"/>
+          </a:effectRef>
+          <a:fontRef idx="minor">
+            <a:schemeClr val="lt1"/>
+          </a:fontRef>
+        </p:style>
+        <p:txBody>
+          <a:bodyPr rtlCol="0" anchor="ctr"/>
+          <a:lstStyle/>
+          <a:p>
+            <a:pPr algn="ctr"/>
+          </a:p>
+        </p:txBody>
+      </p:sp>
+      <p:sp>
+        <p:nvSpPr>
+          <p:cNvPr id="31" name="Rectangle 30"/>
+          <p:cNvSpPr/>
+          <p:nvPr/>
+        </p:nvSpPr>
+        <p:spPr>
+          <a:xfrm>
+            <a:off x="8686800" y="1371600"/>
+            <a:ext cx="2560320" cy="54864"/>
+          </a:xfrm>
+          <a:prstGeom prst="rect">
+            <a:avLst/>
+          </a:prstGeom>
+          <a:solidFill>
+            <a:srgbClr val="2ECC71"/>
+          </a:solidFill>
+          <a:ln>
+            <a:noFill/>
+          </a:ln>
+        </p:spPr>
+        <p:style>
+          <a:lnRef idx="1">
+            <a:schemeClr val="accent1"/>
+          </a:lnRef>
+          <a:fillRef idx="3">
+            <a:schemeClr val="accent1"/>
+          </a:fillRef>
+          <a:effectRef idx="2">
+            <a:schemeClr val="accent1"/>
+          </a:effectRef>
+          <a:fontRef idx="minor">
+            <a:schemeClr val="lt1"/>
+          </a:fontRef>
+        </p:style>
+        <p:txBody>
+          <a:bodyPr rtlCol="0" anchor="ctr"/>
+          <a:lstStyle/>
+          <a:p>
+            <a:pPr algn="ctr"/>
+          </a:p>
+        </p:txBody>
+      </p:sp>
+      <p:sp>
+        <p:nvSpPr>
+          <p:cNvPr id="32" name="Oval 31"/>
+          <p:cNvSpPr/>
+          <p:nvPr/>
+        </p:nvSpPr>
+        <p:spPr>
+          <a:xfrm>
+            <a:off x="9692640" y="1554480"/>
+            <a:ext cx="502920" cy="502920"/>
+          </a:xfrm>
+          <a:prstGeom prst="ellipse">
+            <a:avLst/>
+          </a:prstGeom>
+          <a:solidFill>
+            <a:srgbClr val="2ECC71"/>
+          </a:solidFill>
+          <a:ln>
+            <a:noFill/>
+          </a:ln>
+        </p:spPr>
+        <p:style>
+          <a:lnRef idx="1">
+            <a:schemeClr val="accent1"/>
+          </a:lnRef>
+          <a:fillRef idx="3">
+            <a:schemeClr val="accent1"/>
+          </a:fillRef>
+          <a:effectRef idx="2">
+            <a:schemeClr val="accent1"/>
+          </a:effectRef>
+          <a:fontRef idx="minor">
+            <a:schemeClr val="lt1"/>
+          </a:fontRef>
+        </p:style>
+        <p:txBody>
+          <a:bodyPr rtlCol="0" anchor="ctr"/>
+          <a:lstStyle/>
+          <a:p>
+            <a:pPr algn="ctr"/>
+          </a:p>
+        </p:txBody>
+      </p:sp>
+      <p:sp>
+        <p:nvSpPr>
+          <p:cNvPr id="33" name="TextBox 32"/>
+          <p:cNvSpPr txBox="1"/>
+          <p:nvPr/>
+        </p:nvSpPr>
+        <p:spPr>
+          <a:xfrm>
+            <a:off x="9692640" y="1554480"/>
+            <a:ext cx="502920" cy="502920"/>
+          </a:xfrm>
+          <a:prstGeom prst="rect">
+            <a:avLst/>
+          </a:prstGeom>
+          <a:noFill/>
+        </p:spPr>
+        <p:txBody>
+          <a:bodyPr wrap="square" anchor="ctr"/>
+          <a:lstStyle/>
+          <a:p>
+            <a:pPr algn="ctr"/>
+            <a:r>
+              <a:rPr sz="1800" b="1" i="0">
+                <a:solidFill>
+                  <a:srgbClr val="1D252C"/>
+                </a:solidFill>
+                <a:latin typeface="Segoe UI"/>
+              </a:rPr>
+              <a:t>04</a:t>
+            </a:r>
+          </a:p>
+        </p:txBody>
+      </p:sp>
+      <p:sp>
+        <p:nvSpPr>
+          <p:cNvPr id="34" name="TextBox 33"/>
+          <p:cNvSpPr txBox="1"/>
+          <p:nvPr/>
+        </p:nvSpPr>
+        <p:spPr>
+          <a:xfrm>
+            <a:off x="8823960" y="2148840"/>
+            <a:ext cx="2286000" cy="320040"/>
+          </a:xfrm>
+          <a:prstGeom prst="rect">
+            <a:avLst/>
+          </a:prstGeom>
+          <a:noFill/>
+        </p:spPr>
+        <p:txBody>
+          <a:bodyPr wrap="square" anchor="t"/>
+          <a:lstStyle/>
+          <a:p>
+            <a:pPr algn="ctr"/>
+            <a:r>
+              <a:rPr sz="1400" b="1" i="0">
+                <a:solidFill>
+                  <a:srgbClr val="2ECC71"/>
+                </a:solidFill>
+                <a:latin typeface="Segoe UI"/>
+              </a:rPr>
+              <a:t>Organization Rollout</a:t>
+            </a:r>
+          </a:p>
+        </p:txBody>
+      </p:sp>
+      <p:sp>
+        <p:nvSpPr>
+          <p:cNvPr id="35" name="TextBox 34"/>
+          <p:cNvSpPr txBox="1"/>
+          <p:nvPr/>
+        </p:nvSpPr>
+        <p:spPr>
+          <a:xfrm>
+            <a:off x="8823960" y="2514600"/>
+            <a:ext cx="2286000" cy="914400"/>
+          </a:xfrm>
+          <a:prstGeom prst="rect">
+            <a:avLst/>
+          </a:prstGeom>
+          <a:noFill/>
+        </p:spPr>
+        <p:txBody>
+          <a:bodyPr wrap="square" anchor="t"/>
+          <a:lstStyle/>
+          <a:p>
+            <a:pPr algn="ctr"/>
+            <a:r>
+              <a:rPr sz="1000" b="0" i="0">
+                <a:solidFill>
+                  <a:srgbClr val="F2F4F5"/>
+                </a:solidFill>
+                <a:latin typeface="Segoe UI"/>
+              </a:rPr>
+              <a:t>Onboard remaining teams. Configure golden
+images with standard Forcepoint policies.</a:t>
+            </a:r>
+          </a:p>
+        </p:txBody>
+      </p:sp>
+      <p:sp>
+        <p:nvSpPr>
+          <p:cNvPr id="36" name="Rounded Rectangle 35"/>
+          <p:cNvSpPr/>
+          <p:nvPr/>
+        </p:nvSpPr>
+        <p:spPr>
+          <a:xfrm>
+            <a:off x="9418320" y="3703320"/>
+            <a:ext cx="1097280" cy="256032"/>
+          </a:xfrm>
+          <a:prstGeom prst="roundRect">
+            <a:avLst/>
+          </a:prstGeom>
+          <a:solidFill>
+            <a:srgbClr val="8A939B"/>
+          </a:solidFill>
+          <a:ln>
+            <a:noFill/>
+          </a:ln>
+        </p:spPr>
+        <p:style>
+          <a:lnRef idx="1">
+            <a:schemeClr val="accent1"/>
+          </a:lnRef>
+          <a:fillRef idx="3">
+            <a:schemeClr val="accent1"/>
+          </a:fillRef>
+          <a:effectRef idx="2">
+            <a:schemeClr val="accent1"/>
+          </a:effectRef>
+          <a:fontRef idx="minor">
+            <a:schemeClr val="lt1"/>
+          </a:fontRef>
+        </p:style>
+        <p:txBody>
+          <a:bodyPr rtlCol="0" anchor="ctr"/>
+          <a:lstStyle/>
+          <a:p>
+            <a:pPr algn="ctr"/>
+          </a:p>
+        </p:txBody>
+      </p:sp>
+      <p:sp>
+        <p:nvSpPr>
+          <p:cNvPr id="37" name="TextBox 36"/>
+          <p:cNvSpPr txBox="1"/>
+          <p:nvPr/>
+        </p:nvSpPr>
+        <p:spPr>
+          <a:xfrm>
+            <a:off x="9418320" y="3703320"/>
+            <a:ext cx="1097280" cy="256032"/>
+          </a:xfrm>
+          <a:prstGeom prst="rect">
+            <a:avLst/>
+          </a:prstGeom>
+          <a:noFill/>
+        </p:spPr>
+        <p:txBody>
+          <a:bodyPr wrap="square" anchor="ctr"/>
+          <a:lstStyle/>
+          <a:p>
+            <a:pPr algn="ctr"/>
+            <a:r>
+              <a:rPr sz="800" b="1" i="0">
+                <a:solidFill>
+                  <a:srgbClr val="1D252C"/>
+                </a:solidFill>
+                <a:latin typeface="Segoe UI"/>
+              </a:rPr>
+              <a:t>PLANNED</a:t>
+            </a:r>
+          </a:p>
+        </p:txBody>
+      </p:sp>
+      <p:sp>
+        <p:nvSpPr>
+          <p:cNvPr id="38" name="Rounded Rectangle 37"/>
+          <p:cNvSpPr/>
+          <p:nvPr/>
+        </p:nvSpPr>
+        <p:spPr>
+          <a:xfrm>
+            <a:off x="457200" y="4389120"/>
+            <a:ext cx="11155680" cy="1280160"/>
+          </a:xfrm>
+          <a:prstGeom prst="roundRect">
+            <a:avLst/>
+          </a:prstGeom>
+          <a:solidFill>
+            <a:srgbClr val="242F39"/>
+          </a:solidFill>
+          <a:ln w="12700">
+            <a:solidFill>
+              <a:srgbClr val="007565"/>
+            </a:solidFill>
+          </a:ln>
+        </p:spPr>
+        <p:style>
+          <a:lnRef idx="1">
+            <a:schemeClr val="accent1"/>
+          </a:lnRef>
+          <a:fillRef idx="3">
+            <a:schemeClr val="accent1"/>
+          </a:fillRef>
+          <a:effectRef idx="2">
+            <a:schemeClr val="accent1"/>
+          </a:effectRef>
+          <a:fontRef idx="minor">
+            <a:schemeClr val="lt1"/>
+          </a:fontRef>
+        </p:style>
+        <p:txBody>
+          <a:bodyPr rtlCol="0" anchor="ctr"/>
+          <a:lstStyle/>
+          <a:p>
+            <a:pPr algn="ctr"/>
+          </a:p>
+        </p:txBody>
+      </p:sp>
+      <p:sp>
+        <p:nvSpPr>
+          <p:cNvPr id="39" name="Rectangle 38"/>
+          <p:cNvSpPr/>
+          <p:nvPr/>
+        </p:nvSpPr>
+        <p:spPr>
+          <a:xfrm>
+            <a:off x="457200" y="4389120"/>
+            <a:ext cx="11155680" cy="54864"/>
+          </a:xfrm>
+          <a:prstGeom prst="rect">
+            <a:avLst/>
+          </a:prstGeom>
+          <a:solidFill>
+            <a:srgbClr val="007565"/>
+          </a:solidFill>
+          <a:ln>
+            <a:noFill/>
+          </a:ln>
+        </p:spPr>
+        <p:style>
+          <a:lnRef idx="1">
+            <a:schemeClr val="accent1"/>
+          </a:lnRef>
+          <a:fillRef idx="3">
+            <a:schemeClr val="accent1"/>
+          </a:fillRef>
+          <a:effectRef idx="2">
+            <a:schemeClr val="accent1"/>
+          </a:effectRef>
+          <a:fontRef idx="minor">
+            <a:schemeClr val="lt1"/>
+          </a:fontRef>
+        </p:style>
+        <p:txBody>
+          <a:bodyPr rtlCol="0" anchor="ctr"/>
+          <a:lstStyle/>
+          <a:p>
+            <a:pPr algn="ctr"/>
+          </a:p>
+        </p:txBody>
+      </p:sp>
+      <p:sp>
+        <p:nvSpPr>
+          <p:cNvPr id="40" name="TextBox 39"/>
+          <p:cNvSpPr txBox="1"/>
+          <p:nvPr/>
+        </p:nvSpPr>
+        <p:spPr>
+          <a:xfrm>
+            <a:off x="731520" y="4526280"/>
+            <a:ext cx="10607040" cy="365760"/>
+          </a:xfrm>
+          <a:prstGeom prst="rect">
+            <a:avLst/>
+          </a:prstGeom>
+          <a:noFill/>
+        </p:spPr>
+        <p:txBody>
+          <a:bodyPr wrap="square" anchor="t"/>
+          <a:lstStyle/>
+          <a:p>
+            <a:pPr algn="l"/>
+            <a:r>
+              <a:rPr sz="1600" b="1" i="0">
+                <a:solidFill>
+                  <a:srgbClr val="009E8A"/>
+                </a:solidFill>
+                <a:latin typeface="Segoe UI"/>
+              </a:rPr>
+              <a:t>What We Need</a:t>
+            </a:r>
+          </a:p>
+        </p:txBody>
+      </p:sp>
+      <p:sp>
+        <p:nvSpPr>
+          <p:cNvPr id="41" name="TextBox 40"/>
+          <p:cNvSpPr txBox="1"/>
+          <p:nvPr/>
+        </p:nvSpPr>
+        <p:spPr>
+          <a:xfrm>
+            <a:off x="731520" y="4937760"/>
+            <a:ext cx="10607040" cy="731520"/>
+          </a:xfrm>
+          <a:prstGeom prst="rect">
+            <a:avLst/>
+          </a:prstGeom>
+          <a:noFill/>
+        </p:spPr>
+        <p:txBody>
+          <a:bodyPr wrap="square"/>
+          <a:lstStyle/>
+          <a:p>
+            <a:pPr algn="l">
+              <a:spcAft>
+                <a:spcPts val="400"/>
+              </a:spcAft>
+            </a:pPr>
+            <a:r>
+              <a:rPr sz="1100" b="0">
+                <a:solidFill>
+                  <a:srgbClr val="F2F4F5"/>
+                </a:solidFill>
+                <a:latin typeface="Segoe UI"/>
+              </a:rPr>
+              <a:t>▸  Approval to proceed with hardware collection from IT decommission inventory</a:t>
+            </a:r>
+          </a:p>
+          <a:p>
+            <a:pPr algn="l">
+              <a:spcAft>
+                <a:spcPts val="400"/>
+              </a:spcAft>
+            </a:pPr>
+            <a:r>
+              <a:rPr sz="1100" b="0">
+                <a:solidFill>
+                  <a:srgbClr val="F2F4F5"/>
+                </a:solidFill>
+                <a:latin typeface="Segoe UI"/>
+              </a:rPr>
+              <a:t>▸  Coordination with Go4Labs team for network port mapping integration</a:t>
+            </a:r>
+          </a:p>
+          <a:p>
+            <a:pPr algn="l">
+              <a:spcAft>
+                <a:spcPts val="400"/>
+              </a:spcAft>
+            </a:pPr>
+            <a:r>
+              <a:rPr sz="1100" b="0">
+                <a:solidFill>
+                  <a:srgbClr val="F2F4F5"/>
+                </a:solidFill>
+                <a:latin typeface="Segoe UI"/>
+              </a:rPr>
+              <a:t>▸  Stakeholder buy-in from team leads for onboarding and golden image requirements</a:t>
+            </a:r>
+          </a:p>
+        </p:txBody>
+      </p:sp>
+      <p:sp>
+        <p:nvSpPr>
+          <p:cNvPr id="42" name="Rounded Rectangle 41"/>
+          <p:cNvSpPr/>
+          <p:nvPr/>
+        </p:nvSpPr>
+        <p:spPr>
+          <a:xfrm>
+            <a:off x="457200" y="5943600"/>
+            <a:ext cx="11155680" cy="502920"/>
+          </a:xfrm>
+          <a:prstGeom prst="roundRect">
+            <a:avLst/>
+          </a:prstGeom>
+          <a:solidFill>
+            <a:srgbClr val="005C50"/>
+          </a:solidFill>
+          <a:ln w="12700">
+            <a:solidFill>
+              <a:srgbClr val="007565"/>
+            </a:solidFill>
+          </a:ln>
+        </p:spPr>
+        <p:style>
+          <a:lnRef idx="1">
+            <a:schemeClr val="accent1"/>
+          </a:lnRef>
+          <a:fillRef idx="3">
+            <a:schemeClr val="accent1"/>
+          </a:fillRef>
+          <a:effectRef idx="2">
+            <a:schemeClr val="accent1"/>
+          </a:effectRef>
+          <a:fontRef idx="minor">
+            <a:schemeClr val="lt1"/>
+          </a:fontRef>
+        </p:style>
+        <p:txBody>
+          <a:bodyPr rtlCol="0" anchor="ctr"/>
+          <a:lstStyle/>
+          <a:p>
+            <a:pPr algn="ctr"/>
+          </a:p>
+        </p:txBody>
+      </p:sp>
+      <p:sp>
+        <p:nvSpPr>
+          <p:cNvPr id="43" name="TextBox 42"/>
+          <p:cNvSpPr txBox="1"/>
+          <p:nvPr/>
+        </p:nvSpPr>
+        <p:spPr>
+          <a:xfrm>
+            <a:off x="640080" y="5989320"/>
+            <a:ext cx="10789920" cy="411480"/>
+          </a:xfrm>
+          <a:prstGeom prst="rect">
+            <a:avLst/>
+          </a:prstGeom>
+          <a:noFill/>
+        </p:spPr>
+        <p:txBody>
+          <a:bodyPr wrap="square" anchor="ctr"/>
+          <a:lstStyle/>
+          <a:p>
+            <a:pPr algn="ctr"/>
+            <a:r>
+              <a:rPr sz="1300" b="1" i="0">
+                <a:solidFill>
+                  <a:srgbClr val="FFFFFF"/>
+                </a:solidFill>
+                <a:latin typeface="Segoe UI"/>
+              </a:rPr>
+              <a:t>FP MAppleLab is ready to scale — let's bring native macOS access to every team that needs it</a:t>
+            </a:r>
+          </a:p>
+        </p:txBody>
+      </p:sp>
+      <p:sp>
+        <p:nvSpPr>
+          <p:cNvPr id="44" name="Rectangle 43"/>
+          <p:cNvSpPr/>
+          <p:nvPr/>
+        </p:nvSpPr>
+        <p:spPr>
+          <a:xfrm>
+            <a:off x="0" y="6528816"/>
+            <a:ext cx="12188952" cy="329184"/>
+          </a:xfrm>
+          <a:prstGeom prst="rect">
+            <a:avLst/>
+          </a:prstGeom>
+          <a:solidFill>
+            <a:srgbClr val="005C50"/>
+          </a:solidFill>
+          <a:ln>
+            <a:noFill/>
+          </a:ln>
+        </p:spPr>
+        <p:style>
+          <a:lnRef idx="1">
+            <a:schemeClr val="accent1"/>
+          </a:lnRef>
+          <a:fillRef idx="3">
+            <a:schemeClr val="accent1"/>
+          </a:fillRef>
+          <a:effectRef idx="2">
+            <a:schemeClr val="accent1"/>
+          </a:effectRef>
+          <a:fontRef idx="minor">
+            <a:schemeClr val="lt1"/>
+          </a:fontRef>
+        </p:style>
+        <p:txBody>
+          <a:bodyPr rtlCol="0" anchor="ctr"/>
+          <a:lstStyle/>
+          <a:p>
+            <a:pPr algn="ctr"/>
+          </a:p>
+        </p:txBody>
+      </p:sp>
+      <p:sp>
+        <p:nvSpPr>
+          <p:cNvPr id="45" name="TextBox 44"/>
+          <p:cNvSpPr txBox="1"/>
+          <p:nvPr/>
+        </p:nvSpPr>
+        <p:spPr>
+          <a:xfrm>
+            <a:off x="457200" y="6565392"/>
+            <a:ext cx="10972800" cy="256032"/>
+          </a:xfrm>
+          <a:prstGeom prst="rect">
+            <a:avLst/>
+          </a:prstGeom>
+          <a:noFill/>
+        </p:spPr>
+        <p:txBody>
+          <a:bodyPr wrap="square" anchor="t"/>
+          <a:lstStyle/>
+          <a:p>
+            <a:pPr algn="l"/>
+            <a:r>
+              <a:rPr sz="800" b="0" i="0">
+                <a:solidFill>
+                  <a:srgbClr val="FFFFFF"/>
+                </a:solidFill>
+                <a:latin typeface="Segoe UI"/>
+              </a:rPr>
+              <a:t>FORCEPOINT CONFIDENTIAL</a:t>
+            </a:r>
+          </a:p>
+        </p:txBody>
+      </p:sp>
+    </p:spTree>
+  </p:cSld>
+  <p:clrMapOvr>
+    <a:masterClrMapping/>
+  </p:clrMapOvr>
+</p:sld>
+</file>
+
+<file path=ppt/slides/slide22.xml><?xml version="1.0" encoding="utf-8"?>
+<p:sld xmlns:a="http://schemas.openxmlformats.org/drawingml/2006/main" xmlns:p="http://schemas.openxmlformats.org/presentationml/2006/main" xmlns:r="http://schemas.openxmlformats.org/officeDocument/2006/relationships">
+  <p:cSld>
+    <p:spTree>
+      <p:nvGrpSpPr>
+        <p:cNvPr id="1" name=""/>
+        <p:cNvGrpSpPr/>
+        <p:nvPr/>
+      </p:nvGrpSpPr>
+      <p:grpSpPr/>
+      <p:sp>
+        <p:nvSpPr>
+          <p:cNvPr id="2" name="Rectangle 1"/>
+          <p:cNvSpPr/>
+          <p:nvPr/>
+        </p:nvSpPr>
+        <p:spPr>
+          <a:xfrm>
+            <a:off x="0" y="0"/>
+            <a:ext cx="12188952" cy="6858000"/>
+          </a:xfrm>
+          <a:prstGeom prst="rect">
+            <a:avLst/>
+          </a:prstGeom>
+          <a:solidFill>
+            <a:srgbClr val="1D252C"/>
+          </a:solidFill>
+          <a:ln>
+            <a:noFill/>
+          </a:ln>
+        </p:spPr>
+        <p:style>
+          <a:lnRef idx="1">
+            <a:schemeClr val="accent1"/>
+          </a:lnRef>
+          <a:fillRef idx="3">
+            <a:schemeClr val="accent1"/>
+          </a:fillRef>
+          <a:effectRef idx="2">
+            <a:schemeClr val="accent1"/>
+          </a:effectRef>
+          <a:fontRef idx="minor">
+            <a:schemeClr val="lt1"/>
+          </a:fontRef>
+        </p:style>
+        <p:txBody>
+          <a:bodyPr rtlCol="0" anchor="ctr"/>
+          <a:lstStyle/>
+          <a:p>
+            <a:pPr algn="ctr"/>
+          </a:p>
+        </p:txBody>
+      </p:sp>
+      <p:sp>
+        <p:nvSpPr>
+          <p:cNvPr id="3" name="Rectangle 2"/>
+          <p:cNvSpPr/>
+          <p:nvPr/>
+        </p:nvSpPr>
+        <p:spPr>
+          <a:xfrm>
+            <a:off x="0" y="0"/>
+            <a:ext cx="320040" cy="6858000"/>
+          </a:xfrm>
+          <a:prstGeom prst="rect">
+            <a:avLst/>
+          </a:prstGeom>
+          <a:solidFill>
+            <a:srgbClr val="007565"/>
+          </a:solidFill>
+          <a:ln>
+            <a:noFill/>
+          </a:ln>
+        </p:spPr>
+        <p:style>
+          <a:lnRef idx="1">
+            <a:schemeClr val="accent1"/>
+          </a:lnRef>
+          <a:fillRef idx="3">
+            <a:schemeClr val="accent1"/>
+          </a:fillRef>
+          <a:effectRef idx="2">
+            <a:schemeClr val="accent1"/>
+          </a:effectRef>
+          <a:fontRef idx="minor">
+            <a:schemeClr val="lt1"/>
+          </a:fontRef>
+        </p:style>
+        <p:txBody>
+          <a:bodyPr rtlCol="0" anchor="ctr"/>
+          <a:lstStyle/>
+          <a:p>
+            <a:pPr algn="ctr"/>
+          </a:p>
+        </p:txBody>
+      </p:sp>
+      <p:sp>
+        <p:nvSpPr>
+          <p:cNvPr id="4" name="Rectangle 3"/>
+          <p:cNvSpPr/>
+          <p:nvPr/>
+        </p:nvSpPr>
+        <p:spPr>
+          <a:xfrm>
+            <a:off x="0" y="0"/>
+            <a:ext cx="12188952" cy="54864"/>
+          </a:xfrm>
+          <a:prstGeom prst="rect">
+            <a:avLst/>
+          </a:prstGeom>
+          <a:solidFill>
+            <a:srgbClr val="007565"/>
+          </a:solidFill>
+          <a:ln>
+            <a:noFill/>
+          </a:ln>
+        </p:spPr>
+        <p:style>
+          <a:lnRef idx="1">
+            <a:schemeClr val="accent1"/>
+          </a:lnRef>
+          <a:fillRef idx="3">
+            <a:schemeClr val="accent1"/>
+          </a:fillRef>
+          <a:effectRef idx="2">
+            <a:schemeClr val="accent1"/>
+          </a:effectRef>
+          <a:fontRef idx="minor">
+            <a:schemeClr val="lt1"/>
+          </a:fontRef>
+        </p:style>
+        <p:txBody>
+          <a:bodyPr rtlCol="0" anchor="ctr"/>
+          <a:lstStyle/>
+          <a:p>
+            <a:pPr algn="ctr"/>
+          </a:p>
+        </p:txBody>
+      </p:sp>
+      <p:sp>
+        <p:nvSpPr>
           <p:cNvPr id="5" name="TextBox 4"/>
           <p:cNvSpPr txBox="1"/>
           <p:nvPr/>
@@ -18015,7 +19758,7 @@
                 </a:solidFill>
                 <a:latin typeface="Segoe UI"/>
               </a:rPr>
-              <a:t>On-Demand macOS. Native Performance. Minimal Investment.</a:t>
+              <a:t>On-Demand macOS. Native Performance. Free to Start.</a:t>
             </a:r>
           </a:p>
         </p:txBody>
@@ -18882,7 +20625,7 @@
                 </a:solidFill>
                 <a:latin typeface="Segoe UI"/>
               </a:rPr>
-              <a:t>💰  Minimal Investment</a:t>
+              <a:t>💰  Free Tier Included</a:t>
             </a:r>
           </a:p>
         </p:txBody>
@@ -18917,8 +20660,8 @@
               </a:rPr>
               <a:t>Leverages decommissioned
 Mac Mini &amp; MacBook Pro
-hardware. One-time BSL 1.1
-license for production use.</a:t>
+hardware. Software free up
+to 100 CPU cores (~20 VMs).</a:t>
             </a:r>
           </a:p>
         </p:txBody>
@@ -19865,7 +21608,7 @@
                 </a:solidFill>
                 <a:latin typeface="Segoe UI"/>
               </a:rPr>
-              <a:t>Licensing: Apple + BSL 1.1</a:t>
+              <a:t>Licensing: Free Tier + Services</a:t>
             </a:r>
           </a:p>
         </p:txBody>
@@ -19899,8 +21642,8 @@
                 <a:latin typeface="Segoe UI"/>
               </a:rPr>
               <a:t>Apple EULA compliant — native Virtualization.framework,
-max 2 VMs per physical node. MAppleLab is distributed under
-BSL 1.1: source-available, production use requires a one-time license.</a:t>
+max 2 VMs per physical node. TART: Fair Use license, free up to 100 cores.
+MAppleLab: free at this tier. Setup &amp; maintenance services available.</a:t>
             </a:r>
           </a:p>
         </p:txBody>
@@ -21148,7 +22891,7 @@
                 </a:solidFill>
                 <a:latin typeface="Segoe UI"/>
               </a:rPr>
-              <a:t>Apple EULA compliant (native Virtualization.framework, 2 VMs/node). MAppleLab under BSL 1.1 — one-time production license.</a:t>
+              <a:t>Apple EULA (2 VMs/node). TART Fair Use free tier (100 cores). MAppleLab free at this level. No licensing barriers.</a:t>
             </a:r>
           </a:p>
         </p:txBody>
@@ -21534,7 +23277,7 @@
                 </a:solidFill>
                 <a:latin typeface="Segoe UI"/>
               </a:rPr>
-              <a:t>FP MAppleLab delivers instant, compliant, native macOS access with minimal infrastructure investment</a:t>
+              <a:t>FP MAppleLab delivers instant, compliant, native macOS access — free tier covers up to 20 concurrent VMs</a:t>
             </a:r>
           </a:p>
         </p:txBody>
